--- a/HR-Employee-Analytics-Dashboard.pptx
+++ b/HR-Employee-Analytics-Dashboard.pptx
@@ -6029,100 +6029,6 @@
           </p:txBody>
         </p:sp>
       </p:grpSp>
-      <p:grpSp>
-        <p:nvGrpSpPr>
-          <p:cNvPr id="8" name="Group 8"/>
-          <p:cNvGrpSpPr/>
-          <p:nvPr/>
-        </p:nvGrpSpPr>
-        <p:grpSpPr>
-          <a:xfrm>
-            <a:off x="7851410" y="6413249"/>
-            <a:ext cx="350015" cy="440579"/>
-            <a:chOff x="0" y="0"/>
-            <a:chExt cx="466687" cy="587438"/>
-          </a:xfrm>
-        </p:grpSpPr>
-        <p:sp>
-          <p:nvSpPr>
-            <p:cNvPr id="9" name="Freeform 9"/>
-            <p:cNvSpPr/>
-            <p:nvPr/>
-          </p:nvSpPr>
-          <p:spPr>
-            <a:xfrm>
-              <a:off x="0" y="0"/>
-              <a:ext cx="466852" cy="587502"/>
-            </a:xfrm>
-            <a:custGeom>
-              <a:avLst/>
-              <a:gdLst/>
-              <a:ahLst/>
-              <a:cxnLst/>
-              <a:rect l="l" t="t" r="r" b="b"/>
-              <a:pathLst>
-                <a:path w="466852" h="587502">
-                  <a:moveTo>
-                    <a:pt x="0" y="46736"/>
-                  </a:moveTo>
-                  <a:cubicBezTo>
-                    <a:pt x="0" y="20955"/>
-                    <a:pt x="20955" y="0"/>
-                    <a:pt x="46736" y="0"/>
-                  </a:cubicBezTo>
-                  <a:lnTo>
-                    <a:pt x="420116" y="0"/>
-                  </a:lnTo>
-                  <a:cubicBezTo>
-                    <a:pt x="445897" y="0"/>
-                    <a:pt x="466852" y="20955"/>
-                    <a:pt x="466852" y="46736"/>
-                  </a:cubicBezTo>
-                  <a:lnTo>
-                    <a:pt x="466852" y="540766"/>
-                  </a:lnTo>
-                  <a:cubicBezTo>
-                    <a:pt x="466852" y="566547"/>
-                    <a:pt x="445897" y="587502"/>
-                    <a:pt x="420116" y="587502"/>
-                  </a:cubicBezTo>
-                  <a:lnTo>
-                    <a:pt x="46736" y="587502"/>
-                  </a:lnTo>
-                  <a:cubicBezTo>
-                    <a:pt x="20955" y="587375"/>
-                    <a:pt x="0" y="566547"/>
-                    <a:pt x="0" y="540766"/>
-                  </a:cubicBezTo>
-                  <a:close/>
-                </a:path>
-              </a:pathLst>
-            </a:custGeom>
-            <a:blipFill>
-              <a:blip r:embed="rId4">
-                <a:alphaModFix amt="0"/>
-              </a:blip>
-              <a:stretch>
-                <a:fillRect l="-111461" r="-111426" b="10"/>
-              </a:stretch>
-            </a:blipFill>
-            <a:ln w="9532" cap="sq">
-              <a:solidFill>
-                <a:srgbClr val="2150FE"/>
-              </a:solidFill>
-              <a:prstDash val="solid"/>
-              <a:miter/>
-            </a:ln>
-          </p:spPr>
-          <p:txBody>
-            <a:bodyPr/>
-            <a:lstStyle/>
-            <a:p>
-              <a:endParaRPr lang="en-IN"/>
-            </a:p>
-          </p:txBody>
-        </p:sp>
-      </p:grpSp>
       <p:sp>
         <p:nvSpPr>
           <p:cNvPr id="10" name="TextBox 10"/>
@@ -6220,7 +6126,7 @@
           <p:nvPr/>
         </p:nvPicPr>
         <p:blipFill>
-          <a:blip r:embed="rId5">
+          <a:blip r:embed="rId4">
             <a:extLst>
               <a:ext uri="{28A0092B-C50C-407E-A947-70E740481C1C}">
                 <a14:useLocalDpi xmlns:a14="http://schemas.microsoft.com/office/drawing/2010/main" val="0"/>

--- a/HR-Employee-Analytics-Dashboard.pptx
+++ b/HR-Employee-Analytics-Dashboard.pptx
@@ -6029,6 +6029,100 @@
           </p:txBody>
         </p:sp>
       </p:grpSp>
+      <p:grpSp>
+        <p:nvGrpSpPr>
+          <p:cNvPr id="8" name="Group 8"/>
+          <p:cNvGrpSpPr/>
+          <p:nvPr/>
+        </p:nvGrpSpPr>
+        <p:grpSpPr>
+          <a:xfrm>
+            <a:off x="7851410" y="6413249"/>
+            <a:ext cx="350015" cy="440579"/>
+            <a:chOff x="0" y="0"/>
+            <a:chExt cx="466687" cy="587438"/>
+          </a:xfrm>
+        </p:grpSpPr>
+        <p:sp>
+          <p:nvSpPr>
+            <p:cNvPr id="9" name="Freeform 9"/>
+            <p:cNvSpPr/>
+            <p:nvPr/>
+          </p:nvSpPr>
+          <p:spPr>
+            <a:xfrm>
+              <a:off x="0" y="0"/>
+              <a:ext cx="466852" cy="587502"/>
+            </a:xfrm>
+            <a:custGeom>
+              <a:avLst/>
+              <a:gdLst/>
+              <a:ahLst/>
+              <a:cxnLst/>
+              <a:rect l="l" t="t" r="r" b="b"/>
+              <a:pathLst>
+                <a:path w="466852" h="587502">
+                  <a:moveTo>
+                    <a:pt x="0" y="46736"/>
+                  </a:moveTo>
+                  <a:cubicBezTo>
+                    <a:pt x="0" y="20955"/>
+                    <a:pt x="20955" y="0"/>
+                    <a:pt x="46736" y="0"/>
+                  </a:cubicBezTo>
+                  <a:lnTo>
+                    <a:pt x="420116" y="0"/>
+                  </a:lnTo>
+                  <a:cubicBezTo>
+                    <a:pt x="445897" y="0"/>
+                    <a:pt x="466852" y="20955"/>
+                    <a:pt x="466852" y="46736"/>
+                  </a:cubicBezTo>
+                  <a:lnTo>
+                    <a:pt x="466852" y="540766"/>
+                  </a:lnTo>
+                  <a:cubicBezTo>
+                    <a:pt x="466852" y="566547"/>
+                    <a:pt x="445897" y="587502"/>
+                    <a:pt x="420116" y="587502"/>
+                  </a:cubicBezTo>
+                  <a:lnTo>
+                    <a:pt x="46736" y="587502"/>
+                  </a:lnTo>
+                  <a:cubicBezTo>
+                    <a:pt x="20955" y="587375"/>
+                    <a:pt x="0" y="566547"/>
+                    <a:pt x="0" y="540766"/>
+                  </a:cubicBezTo>
+                  <a:close/>
+                </a:path>
+              </a:pathLst>
+            </a:custGeom>
+            <a:blipFill>
+              <a:blip r:embed="rId4">
+                <a:alphaModFix amt="0"/>
+              </a:blip>
+              <a:stretch>
+                <a:fillRect l="-111461" r="-111426" b="10"/>
+              </a:stretch>
+            </a:blipFill>
+            <a:ln w="9532" cap="sq">
+              <a:solidFill>
+                <a:srgbClr val="2150FE"/>
+              </a:solidFill>
+              <a:prstDash val="solid"/>
+              <a:miter/>
+            </a:ln>
+          </p:spPr>
+          <p:txBody>
+            <a:bodyPr/>
+            <a:lstStyle/>
+            <a:p>
+              <a:endParaRPr lang="en-IN"/>
+            </a:p>
+          </p:txBody>
+        </p:sp>
+      </p:grpSp>
       <p:sp>
         <p:nvSpPr>
           <p:cNvPr id="10" name="TextBox 10"/>
@@ -6126,7 +6220,7 @@
           <p:nvPr/>
         </p:nvPicPr>
         <p:blipFill>
-          <a:blip r:embed="rId4">
+          <a:blip r:embed="rId5">
             <a:extLst>
               <a:ext uri="{28A0092B-C50C-407E-A947-70E740481C1C}">
                 <a14:useLocalDpi xmlns:a14="http://schemas.microsoft.com/office/drawing/2010/main" val="0"/>
@@ -7219,10 +7313,10 @@
             </a:pathLst>
           </a:custGeom>
           <a:blipFill>
-            <a:blip>
+            <a:blip r:embed="rId3">
               <a:extLst>
                 <a:ext uri="{96DAC541-7B7A-43D3-8B79-37D633B846F1}">
-                  <asvg:svgBlip xmlns:asvg="http://schemas.microsoft.com/office/drawing/2016/SVG/main" r:embed="rId3"/>
+                  <asvg:svgBlip xmlns:asvg="http://schemas.microsoft.com/office/drawing/2016/SVG/main" r:embed="rId4"/>
                 </a:ext>
               </a:extLst>
             </a:blip>
@@ -7289,7 +7383,7 @@
               </a:pathLst>
             </a:custGeom>
             <a:blipFill>
-              <a:blip r:embed="rId4">
+              <a:blip r:embed="rId5">
                 <a:alphaModFix amt="0"/>
               </a:blip>
               <a:stretch>
@@ -7466,10 +7560,10 @@
             </a:pathLst>
           </a:custGeom>
           <a:blipFill>
-            <a:blip>
+            <a:blip r:embed="rId3">
               <a:extLst>
                 <a:ext uri="{96DAC541-7B7A-43D3-8B79-37D633B846F1}">
-                  <asvg:svgBlip xmlns:asvg="http://schemas.microsoft.com/office/drawing/2016/SVG/main" r:embed="rId3"/>
+                  <asvg:svgBlip xmlns:asvg="http://schemas.microsoft.com/office/drawing/2016/SVG/main" r:embed="rId4"/>
                 </a:ext>
               </a:extLst>
             </a:blip>
@@ -7536,7 +7630,7 @@
               </a:pathLst>
             </a:custGeom>
             <a:blipFill>
-              <a:blip r:embed="rId4">
+              <a:blip r:embed="rId5">
                 <a:alphaModFix amt="0"/>
               </a:blip>
               <a:stretch>
@@ -7713,10 +7807,10 @@
             </a:pathLst>
           </a:custGeom>
           <a:blipFill>
-            <a:blip>
+            <a:blip r:embed="rId6">
               <a:extLst>
                 <a:ext uri="{96DAC541-7B7A-43D3-8B79-37D633B846F1}">
-                  <asvg:svgBlip xmlns:asvg="http://schemas.microsoft.com/office/drawing/2016/SVG/main" r:embed="rId5"/>
+                  <asvg:svgBlip xmlns:asvg="http://schemas.microsoft.com/office/drawing/2016/SVG/main" r:embed="rId7"/>
                 </a:ext>
               </a:extLst>
             </a:blip>
@@ -7783,7 +7877,7 @@
               </a:pathLst>
             </a:custGeom>
             <a:blipFill>
-              <a:blip r:embed="rId4">
+              <a:blip r:embed="rId5">
                 <a:alphaModFix amt="0"/>
               </a:blip>
               <a:stretch>
@@ -7960,10 +8054,10 @@
             </a:pathLst>
           </a:custGeom>
           <a:blipFill>
-            <a:blip>
+            <a:blip r:embed="rId6">
               <a:extLst>
                 <a:ext uri="{96DAC541-7B7A-43D3-8B79-37D633B846F1}">
-                  <asvg:svgBlip xmlns:asvg="http://schemas.microsoft.com/office/drawing/2016/SVG/main" r:embed="rId5"/>
+                  <asvg:svgBlip xmlns:asvg="http://schemas.microsoft.com/office/drawing/2016/SVG/main" r:embed="rId7"/>
                 </a:ext>
               </a:extLst>
             </a:blip>
@@ -8030,7 +8124,7 @@
               </a:pathLst>
             </a:custGeom>
             <a:blipFill>
-              <a:blip r:embed="rId4">
+              <a:blip r:embed="rId5">
                 <a:alphaModFix amt="0"/>
               </a:blip>
               <a:stretch>
@@ -8170,794 +8264,6 @@
       </p:sp>
       <p:sp>
         <p:nvSpPr>
-          <p:cNvPr id="32" name="TextBox 32"/>
-          <p:cNvSpPr txBox="1"/>
-          <p:nvPr/>
-        </p:nvSpPr>
-        <p:spPr>
-          <a:xfrm>
-            <a:off x="9420054" y="2454469"/>
-            <a:ext cx="7898330" cy="351492"/>
-          </a:xfrm>
-          <a:prstGeom prst="rect">
-            <a:avLst/>
-          </a:prstGeom>
-        </p:spPr>
-        <p:txBody>
-          <a:bodyPr lIns="0" tIns="0" rIns="0" bIns="0" rtlCol="0" anchor="t">
-            <a:spAutoFit/>
-          </a:bodyPr>
-          <a:lstStyle/>
-          <a:p>
-            <a:pPr algn="l">
-              <a:lnSpc>
-                <a:spcPts val="2529"/>
-              </a:lnSpc>
-            </a:pPr>
-            <a:r>
-              <a:rPr lang="en-US" sz="2026">
-                <a:solidFill>
-                  <a:srgbClr val="152D47"/>
-                </a:solidFill>
-                <a:latin typeface="Crimson Pro"/>
-                <a:ea typeface="Crimson Pro"/>
-                <a:cs typeface="Crimson Pro"/>
-                <a:sym typeface="Crimson Pro"/>
-              </a:rPr>
-              <a:t>Future Scope</a:t>
-            </a:r>
-          </a:p>
-        </p:txBody>
-      </p:sp>
-      <p:grpSp>
-        <p:nvGrpSpPr>
-          <p:cNvPr id="33" name="Group 33"/>
-          <p:cNvGrpSpPr/>
-          <p:nvPr/>
-        </p:nvGrpSpPr>
-        <p:grpSpPr>
-          <a:xfrm>
-            <a:off x="9739236" y="3198285"/>
-            <a:ext cx="7578995" cy="212693"/>
-            <a:chOff x="0" y="0"/>
-            <a:chExt cx="10105326" cy="283591"/>
-          </a:xfrm>
-        </p:grpSpPr>
-        <p:sp>
-          <p:nvSpPr>
-            <p:cNvPr id="34" name="Freeform 34"/>
-            <p:cNvSpPr/>
-            <p:nvPr/>
-          </p:nvSpPr>
-          <p:spPr>
-            <a:xfrm>
-              <a:off x="0" y="0"/>
-              <a:ext cx="10105263" cy="283591"/>
-            </a:xfrm>
-            <a:custGeom>
-              <a:avLst/>
-              <a:gdLst/>
-              <a:ahLst/>
-              <a:cxnLst/>
-              <a:rect l="l" t="t" r="r" b="b"/>
-              <a:pathLst>
-                <a:path w="10105263" h="283591">
-                  <a:moveTo>
-                    <a:pt x="0" y="42545"/>
-                  </a:moveTo>
-                  <a:cubicBezTo>
-                    <a:pt x="0" y="19050"/>
-                    <a:pt x="19050" y="0"/>
-                    <a:pt x="42545" y="0"/>
-                  </a:cubicBezTo>
-                  <a:lnTo>
-                    <a:pt x="10062718" y="0"/>
-                  </a:lnTo>
-                  <a:cubicBezTo>
-                    <a:pt x="10086213" y="0"/>
-                    <a:pt x="10105263" y="19050"/>
-                    <a:pt x="10105263" y="42545"/>
-                  </a:cubicBezTo>
-                  <a:lnTo>
-                    <a:pt x="10105263" y="241046"/>
-                  </a:lnTo>
-                  <a:cubicBezTo>
-                    <a:pt x="10105263" y="264541"/>
-                    <a:pt x="10086213" y="283591"/>
-                    <a:pt x="10062718" y="283591"/>
-                  </a:cubicBezTo>
-                  <a:lnTo>
-                    <a:pt x="42545" y="283591"/>
-                  </a:lnTo>
-                  <a:cubicBezTo>
-                    <a:pt x="19050" y="283591"/>
-                    <a:pt x="0" y="264541"/>
-                    <a:pt x="0" y="241046"/>
-                  </a:cubicBezTo>
-                  <a:close/>
-                </a:path>
-              </a:pathLst>
-            </a:custGeom>
-            <a:solidFill>
-              <a:srgbClr val="F2EEEE"/>
-            </a:solidFill>
-          </p:spPr>
-          <p:txBody>
-            <a:bodyPr/>
-            <a:lstStyle/>
-            <a:p>
-              <a:endParaRPr lang="en-IN"/>
-            </a:p>
-          </p:txBody>
-        </p:sp>
-      </p:grpSp>
-      <p:grpSp>
-        <p:nvGrpSpPr>
-          <p:cNvPr id="35" name="Group 35"/>
-          <p:cNvGrpSpPr/>
-          <p:nvPr/>
-        </p:nvGrpSpPr>
-        <p:grpSpPr>
-          <a:xfrm>
-            <a:off x="9420054" y="2985440"/>
-            <a:ext cx="638356" cy="638375"/>
-            <a:chOff x="0" y="0"/>
-            <a:chExt cx="851141" cy="851167"/>
-          </a:xfrm>
-        </p:grpSpPr>
-        <p:sp>
-          <p:nvSpPr>
-            <p:cNvPr id="36" name="Freeform 36"/>
-            <p:cNvSpPr/>
-            <p:nvPr/>
-          </p:nvSpPr>
-          <p:spPr>
-            <a:xfrm>
-              <a:off x="0" y="0"/>
-              <a:ext cx="851154" cy="851154"/>
-            </a:xfrm>
-            <a:custGeom>
-              <a:avLst/>
-              <a:gdLst/>
-              <a:ahLst/>
-              <a:cxnLst/>
-              <a:rect l="l" t="t" r="r" b="b"/>
-              <a:pathLst>
-                <a:path w="851154" h="851154">
-                  <a:moveTo>
-                    <a:pt x="0" y="425577"/>
-                  </a:moveTo>
-                  <a:cubicBezTo>
-                    <a:pt x="0" y="190500"/>
-                    <a:pt x="190500" y="0"/>
-                    <a:pt x="425577" y="0"/>
-                  </a:cubicBezTo>
-                  <a:cubicBezTo>
-                    <a:pt x="660654" y="0"/>
-                    <a:pt x="851154" y="190500"/>
-                    <a:pt x="851154" y="425577"/>
-                  </a:cubicBezTo>
-                  <a:cubicBezTo>
-                    <a:pt x="851154" y="660654"/>
-                    <a:pt x="660654" y="851154"/>
-                    <a:pt x="425577" y="851154"/>
-                  </a:cubicBezTo>
-                  <a:cubicBezTo>
-                    <a:pt x="190500" y="851154"/>
-                    <a:pt x="0" y="660654"/>
-                    <a:pt x="0" y="425577"/>
-                  </a:cubicBezTo>
-                  <a:close/>
-                </a:path>
-              </a:pathLst>
-            </a:custGeom>
-            <a:solidFill>
-              <a:srgbClr val="F2EEEE"/>
-            </a:solidFill>
-          </p:spPr>
-          <p:txBody>
-            <a:bodyPr/>
-            <a:lstStyle/>
-            <a:p>
-              <a:endParaRPr lang="en-IN"/>
-            </a:p>
-          </p:txBody>
-        </p:sp>
-      </p:grpSp>
-      <p:sp>
-        <p:nvSpPr>
-          <p:cNvPr id="37" name="Freeform 37" descr="preencoded.png"/>
-          <p:cNvSpPr/>
-          <p:nvPr/>
-        </p:nvSpPr>
-        <p:spPr>
-          <a:xfrm>
-            <a:off x="9579569" y="3145107"/>
-            <a:ext cx="319183" cy="319192"/>
-          </a:xfrm>
-          <a:custGeom>
-            <a:avLst/>
-            <a:gdLst/>
-            <a:ahLst/>
-            <a:cxnLst/>
-            <a:rect l="l" t="t" r="r" b="b"/>
-            <a:pathLst>
-              <a:path w="319183" h="319192">
-                <a:moveTo>
-                  <a:pt x="0" y="0"/>
-                </a:moveTo>
-                <a:lnTo>
-                  <a:pt x="319182" y="0"/>
-                </a:lnTo>
-                <a:lnTo>
-                  <a:pt x="319182" y="319193"/>
-                </a:lnTo>
-                <a:lnTo>
-                  <a:pt x="0" y="319193"/>
-                </a:lnTo>
-                <a:lnTo>
-                  <a:pt x="0" y="0"/>
-                </a:lnTo>
-                <a:close/>
-              </a:path>
-            </a:pathLst>
-          </a:custGeom>
-          <a:blipFill>
-            <a:blip>
-              <a:extLst>
-                <a:ext uri="{96DAC541-7B7A-43D3-8B79-37D633B846F1}">
-                  <asvg:svgBlip xmlns:asvg="http://schemas.microsoft.com/office/drawing/2016/SVG/main" r:embed="rId6"/>
-                </a:ext>
-              </a:extLst>
-            </a:blip>
-            <a:stretch>
-              <a:fillRect l="-1" r="-1"/>
-            </a:stretch>
-          </a:blipFill>
-        </p:spPr>
-        <p:txBody>
-          <a:bodyPr/>
-          <a:lstStyle/>
-          <a:p>
-            <a:endParaRPr lang="en-IN"/>
-          </a:p>
-        </p:txBody>
-      </p:sp>
-      <p:sp>
-        <p:nvSpPr>
-          <p:cNvPr id="38" name="TextBox 38"/>
-          <p:cNvSpPr txBox="1"/>
-          <p:nvPr/>
-        </p:nvSpPr>
-        <p:spPr>
-          <a:xfrm>
-            <a:off x="9632747" y="3764290"/>
-            <a:ext cx="7472953" cy="351492"/>
-          </a:xfrm>
-          <a:prstGeom prst="rect">
-            <a:avLst/>
-          </a:prstGeom>
-        </p:spPr>
-        <p:txBody>
-          <a:bodyPr lIns="0" tIns="0" rIns="0" bIns="0" rtlCol="0" anchor="t">
-            <a:spAutoFit/>
-          </a:bodyPr>
-          <a:lstStyle/>
-          <a:p>
-            <a:pPr algn="l">
-              <a:lnSpc>
-                <a:spcPts val="2529"/>
-              </a:lnSpc>
-            </a:pPr>
-            <a:r>
-              <a:rPr lang="en-US" sz="2026">
-                <a:solidFill>
-                  <a:srgbClr val="4C4C4D"/>
-                </a:solidFill>
-                <a:latin typeface="Crimson Pro"/>
-                <a:ea typeface="Crimson Pro"/>
-                <a:cs typeface="Crimson Pro"/>
-                <a:sym typeface="Crimson Pro"/>
-              </a:rPr>
-              <a:t>Predictive Attrition Model</a:t>
-            </a:r>
-          </a:p>
-        </p:txBody>
-      </p:sp>
-      <p:sp>
-        <p:nvSpPr>
-          <p:cNvPr id="39" name="TextBox 39"/>
-          <p:cNvSpPr txBox="1"/>
-          <p:nvPr/>
-        </p:nvSpPr>
-        <p:spPr>
-          <a:xfrm>
-            <a:off x="9632747" y="4237206"/>
-            <a:ext cx="7472953" cy="335994"/>
-          </a:xfrm>
-          <a:prstGeom prst="rect">
-            <a:avLst/>
-          </a:prstGeom>
-        </p:spPr>
-        <p:txBody>
-          <a:bodyPr lIns="0" tIns="0" rIns="0" bIns="0" rtlCol="0" anchor="t">
-            <a:spAutoFit/>
-          </a:bodyPr>
-          <a:lstStyle/>
-          <a:p>
-            <a:pPr algn="l">
-              <a:lnSpc>
-                <a:spcPts val="2318"/>
-              </a:lnSpc>
-            </a:pPr>
-            <a:r>
-              <a:rPr lang="en-US" sz="1651">
-                <a:solidFill>
-                  <a:srgbClr val="4C4C4D"/>
-                </a:solidFill>
-                <a:latin typeface="Heebo"/>
-                <a:ea typeface="Heebo"/>
-                <a:cs typeface="Heebo"/>
-                <a:sym typeface="Heebo"/>
-              </a:rPr>
-              <a:t>Integrate Python ML models into Power BI for employee flight-risk scoring</a:t>
-            </a:r>
-          </a:p>
-        </p:txBody>
-      </p:sp>
-      <p:grpSp>
-        <p:nvGrpSpPr>
-          <p:cNvPr id="40" name="Group 40"/>
-          <p:cNvGrpSpPr/>
-          <p:nvPr/>
-        </p:nvGrpSpPr>
-        <p:grpSpPr>
-          <a:xfrm>
-            <a:off x="10058419" y="5158245"/>
-            <a:ext cx="7259822" cy="212693"/>
-            <a:chOff x="0" y="0"/>
-            <a:chExt cx="9679762" cy="283591"/>
-          </a:xfrm>
-        </p:grpSpPr>
-        <p:sp>
-          <p:nvSpPr>
-            <p:cNvPr id="41" name="Freeform 41"/>
-            <p:cNvSpPr/>
-            <p:nvPr/>
-          </p:nvSpPr>
-          <p:spPr>
-            <a:xfrm>
-              <a:off x="0" y="0"/>
-              <a:ext cx="9679686" cy="283591"/>
-            </a:xfrm>
-            <a:custGeom>
-              <a:avLst/>
-              <a:gdLst/>
-              <a:ahLst/>
-              <a:cxnLst/>
-              <a:rect l="l" t="t" r="r" b="b"/>
-              <a:pathLst>
-                <a:path w="9679686" h="283591">
-                  <a:moveTo>
-                    <a:pt x="0" y="42545"/>
-                  </a:moveTo>
-                  <a:cubicBezTo>
-                    <a:pt x="0" y="19050"/>
-                    <a:pt x="19050" y="0"/>
-                    <a:pt x="42545" y="0"/>
-                  </a:cubicBezTo>
-                  <a:lnTo>
-                    <a:pt x="9637141" y="0"/>
-                  </a:lnTo>
-                  <a:cubicBezTo>
-                    <a:pt x="9660636" y="0"/>
-                    <a:pt x="9679686" y="19050"/>
-                    <a:pt x="9679686" y="42545"/>
-                  </a:cubicBezTo>
-                  <a:lnTo>
-                    <a:pt x="9679686" y="241046"/>
-                  </a:lnTo>
-                  <a:cubicBezTo>
-                    <a:pt x="9679686" y="264541"/>
-                    <a:pt x="9660636" y="283591"/>
-                    <a:pt x="9637141" y="283591"/>
-                  </a:cubicBezTo>
-                  <a:lnTo>
-                    <a:pt x="42545" y="283591"/>
-                  </a:lnTo>
-                  <a:cubicBezTo>
-                    <a:pt x="19050" y="283591"/>
-                    <a:pt x="0" y="264541"/>
-                    <a:pt x="0" y="241046"/>
-                  </a:cubicBezTo>
-                  <a:close/>
-                </a:path>
-              </a:pathLst>
-            </a:custGeom>
-            <a:solidFill>
-              <a:srgbClr val="F2EEEE"/>
-            </a:solidFill>
-          </p:spPr>
-          <p:txBody>
-            <a:bodyPr/>
-            <a:lstStyle/>
-            <a:p>
-              <a:endParaRPr lang="en-IN"/>
-            </a:p>
-          </p:txBody>
-        </p:sp>
-      </p:grpSp>
-      <p:grpSp>
-        <p:nvGrpSpPr>
-          <p:cNvPr id="42" name="Group 42"/>
-          <p:cNvGrpSpPr/>
-          <p:nvPr/>
-        </p:nvGrpSpPr>
-        <p:grpSpPr>
-          <a:xfrm>
-            <a:off x="9739236" y="4945399"/>
-            <a:ext cx="638356" cy="638375"/>
-            <a:chOff x="0" y="0"/>
-            <a:chExt cx="851141" cy="851167"/>
-          </a:xfrm>
-        </p:grpSpPr>
-        <p:sp>
-          <p:nvSpPr>
-            <p:cNvPr id="43" name="Freeform 43"/>
-            <p:cNvSpPr/>
-            <p:nvPr/>
-          </p:nvSpPr>
-          <p:spPr>
-            <a:xfrm>
-              <a:off x="0" y="0"/>
-              <a:ext cx="851154" cy="851154"/>
-            </a:xfrm>
-            <a:custGeom>
-              <a:avLst/>
-              <a:gdLst/>
-              <a:ahLst/>
-              <a:cxnLst/>
-              <a:rect l="l" t="t" r="r" b="b"/>
-              <a:pathLst>
-                <a:path w="851154" h="851154">
-                  <a:moveTo>
-                    <a:pt x="0" y="425577"/>
-                  </a:moveTo>
-                  <a:cubicBezTo>
-                    <a:pt x="0" y="190500"/>
-                    <a:pt x="190500" y="0"/>
-                    <a:pt x="425577" y="0"/>
-                  </a:cubicBezTo>
-                  <a:cubicBezTo>
-                    <a:pt x="660654" y="0"/>
-                    <a:pt x="851154" y="190500"/>
-                    <a:pt x="851154" y="425577"/>
-                  </a:cubicBezTo>
-                  <a:cubicBezTo>
-                    <a:pt x="851154" y="660654"/>
-                    <a:pt x="660654" y="851154"/>
-                    <a:pt x="425577" y="851154"/>
-                  </a:cubicBezTo>
-                  <a:cubicBezTo>
-                    <a:pt x="190500" y="851154"/>
-                    <a:pt x="0" y="660654"/>
-                    <a:pt x="0" y="425577"/>
-                  </a:cubicBezTo>
-                  <a:close/>
-                </a:path>
-              </a:pathLst>
-            </a:custGeom>
-            <a:solidFill>
-              <a:srgbClr val="F2EEEE"/>
-            </a:solidFill>
-          </p:spPr>
-          <p:txBody>
-            <a:bodyPr/>
-            <a:lstStyle/>
-            <a:p>
-              <a:endParaRPr lang="en-IN"/>
-            </a:p>
-          </p:txBody>
-        </p:sp>
-      </p:grpSp>
-      <p:sp>
-        <p:nvSpPr>
-          <p:cNvPr id="44" name="Freeform 44" descr="preencoded.png"/>
-          <p:cNvSpPr/>
-          <p:nvPr/>
-        </p:nvSpPr>
-        <p:spPr>
-          <a:xfrm>
-            <a:off x="9898751" y="5105076"/>
-            <a:ext cx="319183" cy="319192"/>
-          </a:xfrm>
-          <a:custGeom>
-            <a:avLst/>
-            <a:gdLst/>
-            <a:ahLst/>
-            <a:cxnLst/>
-            <a:rect l="l" t="t" r="r" b="b"/>
-            <a:pathLst>
-              <a:path w="319183" h="319192">
-                <a:moveTo>
-                  <a:pt x="0" y="0"/>
-                </a:moveTo>
-                <a:lnTo>
-                  <a:pt x="319183" y="0"/>
-                </a:lnTo>
-                <a:lnTo>
-                  <a:pt x="319183" y="319192"/>
-                </a:lnTo>
-                <a:lnTo>
-                  <a:pt x="0" y="319192"/>
-                </a:lnTo>
-                <a:lnTo>
-                  <a:pt x="0" y="0"/>
-                </a:lnTo>
-                <a:close/>
-              </a:path>
-            </a:pathLst>
-          </a:custGeom>
-          <a:blipFill>
-            <a:blip>
-              <a:extLst>
-                <a:ext uri="{96DAC541-7B7A-43D3-8B79-37D633B846F1}">
-                  <asvg:svgBlip xmlns:asvg="http://schemas.microsoft.com/office/drawing/2016/SVG/main" r:embed="rId7"/>
-                </a:ext>
-              </a:extLst>
-            </a:blip>
-            <a:stretch>
-              <a:fillRect l="-23530" r="-23530"/>
-            </a:stretch>
-          </a:blipFill>
-        </p:spPr>
-        <p:txBody>
-          <a:bodyPr/>
-          <a:lstStyle/>
-          <a:p>
-            <a:endParaRPr lang="en-IN"/>
-          </a:p>
-        </p:txBody>
-      </p:sp>
-      <p:sp>
-        <p:nvSpPr>
-          <p:cNvPr id="45" name="TextBox 45"/>
-          <p:cNvSpPr txBox="1"/>
-          <p:nvPr/>
-        </p:nvSpPr>
-        <p:spPr>
-          <a:xfrm>
-            <a:off x="9951920" y="5724249"/>
-            <a:ext cx="7153770" cy="351492"/>
-          </a:xfrm>
-          <a:prstGeom prst="rect">
-            <a:avLst/>
-          </a:prstGeom>
-        </p:spPr>
-        <p:txBody>
-          <a:bodyPr lIns="0" tIns="0" rIns="0" bIns="0" rtlCol="0" anchor="t">
-            <a:spAutoFit/>
-          </a:bodyPr>
-          <a:lstStyle/>
-          <a:p>
-            <a:pPr algn="l">
-              <a:lnSpc>
-                <a:spcPts val="2529"/>
-              </a:lnSpc>
-            </a:pPr>
-            <a:r>
-              <a:rPr lang="en-US" sz="2026">
-                <a:solidFill>
-                  <a:srgbClr val="4C4C4D"/>
-                </a:solidFill>
-                <a:latin typeface="Crimson Pro"/>
-                <a:ea typeface="Crimson Pro"/>
-                <a:cs typeface="Crimson Pro"/>
-                <a:sym typeface="Crimson Pro"/>
-              </a:rPr>
-              <a:t>Live HRIS Integration</a:t>
-            </a:r>
-          </a:p>
-        </p:txBody>
-      </p:sp>
-      <p:sp>
-        <p:nvSpPr>
-          <p:cNvPr id="46" name="TextBox 46"/>
-          <p:cNvSpPr txBox="1"/>
-          <p:nvPr/>
-        </p:nvSpPr>
-        <p:spPr>
-          <a:xfrm>
-            <a:off x="9951920" y="6197165"/>
-            <a:ext cx="7153770" cy="335994"/>
-          </a:xfrm>
-          <a:prstGeom prst="rect">
-            <a:avLst/>
-          </a:prstGeom>
-        </p:spPr>
-        <p:txBody>
-          <a:bodyPr lIns="0" tIns="0" rIns="0" bIns="0" rtlCol="0" anchor="t">
-            <a:spAutoFit/>
-          </a:bodyPr>
-          <a:lstStyle/>
-          <a:p>
-            <a:pPr algn="l">
-              <a:lnSpc>
-                <a:spcPts val="2318"/>
-              </a:lnSpc>
-            </a:pPr>
-            <a:r>
-              <a:rPr lang="en-US" sz="1651">
-                <a:solidFill>
-                  <a:srgbClr val="4C4C4D"/>
-                </a:solidFill>
-                <a:latin typeface="Heebo"/>
-                <a:ea typeface="Heebo"/>
-                <a:cs typeface="Heebo"/>
-                <a:sym typeface="Heebo"/>
-              </a:rPr>
-              <a:t>Connect to live HRIS (SAP/Workday) for real-time workforce monitoring</a:t>
-            </a:r>
-          </a:p>
-        </p:txBody>
-      </p:sp>
-      <p:grpSp>
-        <p:nvGrpSpPr>
-          <p:cNvPr id="47" name="Group 47"/>
-          <p:cNvGrpSpPr/>
-          <p:nvPr/>
-        </p:nvGrpSpPr>
-        <p:grpSpPr>
-          <a:xfrm>
-            <a:off x="10377592" y="7118204"/>
-            <a:ext cx="6940639" cy="212693"/>
-            <a:chOff x="0" y="0"/>
-            <a:chExt cx="9254185" cy="283591"/>
-          </a:xfrm>
-        </p:grpSpPr>
-        <p:sp>
-          <p:nvSpPr>
-            <p:cNvPr id="48" name="Freeform 48"/>
-            <p:cNvSpPr/>
-            <p:nvPr/>
-          </p:nvSpPr>
-          <p:spPr>
-            <a:xfrm>
-              <a:off x="0" y="0"/>
-              <a:ext cx="9254109" cy="283591"/>
-            </a:xfrm>
-            <a:custGeom>
-              <a:avLst/>
-              <a:gdLst/>
-              <a:ahLst/>
-              <a:cxnLst/>
-              <a:rect l="l" t="t" r="r" b="b"/>
-              <a:pathLst>
-                <a:path w="9254109" h="283591">
-                  <a:moveTo>
-                    <a:pt x="0" y="42545"/>
-                  </a:moveTo>
-                  <a:cubicBezTo>
-                    <a:pt x="0" y="19050"/>
-                    <a:pt x="19050" y="0"/>
-                    <a:pt x="42545" y="0"/>
-                  </a:cubicBezTo>
-                  <a:lnTo>
-                    <a:pt x="9211564" y="0"/>
-                  </a:lnTo>
-                  <a:cubicBezTo>
-                    <a:pt x="9235059" y="0"/>
-                    <a:pt x="9254109" y="19050"/>
-                    <a:pt x="9254109" y="42545"/>
-                  </a:cubicBezTo>
-                  <a:lnTo>
-                    <a:pt x="9254109" y="241046"/>
-                  </a:lnTo>
-                  <a:cubicBezTo>
-                    <a:pt x="9254109" y="264541"/>
-                    <a:pt x="9235059" y="283591"/>
-                    <a:pt x="9211564" y="283591"/>
-                  </a:cubicBezTo>
-                  <a:lnTo>
-                    <a:pt x="42545" y="283591"/>
-                  </a:lnTo>
-                  <a:cubicBezTo>
-                    <a:pt x="19050" y="283591"/>
-                    <a:pt x="0" y="264541"/>
-                    <a:pt x="0" y="241046"/>
-                  </a:cubicBezTo>
-                  <a:close/>
-                </a:path>
-              </a:pathLst>
-            </a:custGeom>
-            <a:solidFill>
-              <a:srgbClr val="F2EEEE"/>
-            </a:solidFill>
-          </p:spPr>
-          <p:txBody>
-            <a:bodyPr/>
-            <a:lstStyle/>
-            <a:p>
-              <a:endParaRPr lang="en-IN"/>
-            </a:p>
-          </p:txBody>
-        </p:sp>
-      </p:grpSp>
-      <p:grpSp>
-        <p:nvGrpSpPr>
-          <p:cNvPr id="49" name="Group 49"/>
-          <p:cNvGrpSpPr/>
-          <p:nvPr/>
-        </p:nvGrpSpPr>
-        <p:grpSpPr>
-          <a:xfrm>
-            <a:off x="10058419" y="6905368"/>
-            <a:ext cx="638356" cy="638375"/>
-            <a:chOff x="0" y="0"/>
-            <a:chExt cx="851141" cy="851167"/>
-          </a:xfrm>
-        </p:grpSpPr>
-        <p:sp>
-          <p:nvSpPr>
-            <p:cNvPr id="50" name="Freeform 50"/>
-            <p:cNvSpPr/>
-            <p:nvPr/>
-          </p:nvSpPr>
-          <p:spPr>
-            <a:xfrm>
-              <a:off x="0" y="0"/>
-              <a:ext cx="851154" cy="851154"/>
-            </a:xfrm>
-            <a:custGeom>
-              <a:avLst/>
-              <a:gdLst/>
-              <a:ahLst/>
-              <a:cxnLst/>
-              <a:rect l="l" t="t" r="r" b="b"/>
-              <a:pathLst>
-                <a:path w="851154" h="851154">
-                  <a:moveTo>
-                    <a:pt x="0" y="425577"/>
-                  </a:moveTo>
-                  <a:cubicBezTo>
-                    <a:pt x="0" y="190500"/>
-                    <a:pt x="190500" y="0"/>
-                    <a:pt x="425577" y="0"/>
-                  </a:cubicBezTo>
-                  <a:cubicBezTo>
-                    <a:pt x="660654" y="0"/>
-                    <a:pt x="851154" y="190500"/>
-                    <a:pt x="851154" y="425577"/>
-                  </a:cubicBezTo>
-                  <a:cubicBezTo>
-                    <a:pt x="851154" y="660654"/>
-                    <a:pt x="660654" y="851154"/>
-                    <a:pt x="425577" y="851154"/>
-                  </a:cubicBezTo>
-                  <a:cubicBezTo>
-                    <a:pt x="190500" y="851154"/>
-                    <a:pt x="0" y="660654"/>
-                    <a:pt x="0" y="425577"/>
-                  </a:cubicBezTo>
-                  <a:close/>
-                </a:path>
-              </a:pathLst>
-            </a:custGeom>
-            <a:solidFill>
-              <a:srgbClr val="F2EEEE"/>
-            </a:solidFill>
-          </p:spPr>
-          <p:txBody>
-            <a:bodyPr/>
-            <a:lstStyle/>
-            <a:p>
-              <a:endParaRPr lang="en-IN"/>
-            </a:p>
-          </p:txBody>
-        </p:sp>
-      </p:grpSp>
-      <p:sp>
-        <p:nvSpPr>
           <p:cNvPr id="51" name="Freeform 51" descr="preencoded.png"/>
           <p:cNvSpPr/>
           <p:nvPr/>
@@ -8995,10 +8301,10 @@
             </a:pathLst>
           </a:custGeom>
           <a:blipFill>
-            <a:blip>
+            <a:blip r:embed="rId8">
               <a:extLst>
                 <a:ext uri="{96DAC541-7B7A-43D3-8B79-37D633B846F1}">
-                  <asvg:svgBlip xmlns:asvg="http://schemas.microsoft.com/office/drawing/2016/SVG/main" r:embed="rId8"/>
+                  <asvg:svgBlip xmlns:asvg="http://schemas.microsoft.com/office/drawing/2016/SVG/main" r:embed="rId9"/>
                 </a:ext>
               </a:extLst>
             </a:blip>
@@ -9012,88 +8318,6 @@
           <a:lstStyle/>
           <a:p>
             <a:endParaRPr lang="en-IN"/>
-          </a:p>
-        </p:txBody>
-      </p:sp>
-      <p:sp>
-        <p:nvSpPr>
-          <p:cNvPr id="52" name="TextBox 52"/>
-          <p:cNvSpPr txBox="1"/>
-          <p:nvPr/>
-        </p:nvSpPr>
-        <p:spPr>
-          <a:xfrm>
-            <a:off x="10271103" y="7684208"/>
-            <a:ext cx="6834597" cy="351492"/>
-          </a:xfrm>
-          <a:prstGeom prst="rect">
-            <a:avLst/>
-          </a:prstGeom>
-        </p:spPr>
-        <p:txBody>
-          <a:bodyPr lIns="0" tIns="0" rIns="0" bIns="0" rtlCol="0" anchor="t">
-            <a:spAutoFit/>
-          </a:bodyPr>
-          <a:lstStyle/>
-          <a:p>
-            <a:pPr algn="l">
-              <a:lnSpc>
-                <a:spcPts val="2529"/>
-              </a:lnSpc>
-            </a:pPr>
-            <a:r>
-              <a:rPr lang="en-US" sz="2026">
-                <a:solidFill>
-                  <a:srgbClr val="4C4C4D"/>
-                </a:solidFill>
-                <a:latin typeface="Crimson Pro"/>
-                <a:ea typeface="Crimson Pro"/>
-                <a:cs typeface="Crimson Pro"/>
-                <a:sym typeface="Crimson Pro"/>
-              </a:rPr>
-              <a:t>Mobile Dashboard</a:t>
-            </a:r>
-          </a:p>
-        </p:txBody>
-      </p:sp>
-      <p:sp>
-        <p:nvSpPr>
-          <p:cNvPr id="53" name="TextBox 53"/>
-          <p:cNvSpPr txBox="1"/>
-          <p:nvPr/>
-        </p:nvSpPr>
-        <p:spPr>
-          <a:xfrm>
-            <a:off x="10271103" y="8157124"/>
-            <a:ext cx="6834597" cy="335994"/>
-          </a:xfrm>
-          <a:prstGeom prst="rect">
-            <a:avLst/>
-          </a:prstGeom>
-        </p:spPr>
-        <p:txBody>
-          <a:bodyPr lIns="0" tIns="0" rIns="0" bIns="0" rtlCol="0" anchor="t">
-            <a:spAutoFit/>
-          </a:bodyPr>
-          <a:lstStyle/>
-          <a:p>
-            <a:pPr algn="l">
-              <a:lnSpc>
-                <a:spcPts val="2318"/>
-              </a:lnSpc>
-            </a:pPr>
-            <a:r>
-              <a:rPr lang="en-US" sz="1651">
-                <a:solidFill>
-                  <a:srgbClr val="4C4C4D"/>
-                </a:solidFill>
-                <a:latin typeface="Heebo"/>
-                <a:ea typeface="Heebo"/>
-                <a:cs typeface="Heebo"/>
-                <a:sym typeface="Heebo"/>
-              </a:rPr>
-              <a:t>Publish Power BI Mobile reports for executive on-the-go HR insights</a:t>
-            </a:r>
           </a:p>
         </p:txBody>
       </p:sp>
@@ -9112,7 +8336,7 @@
           <p:nvPr/>
         </p:nvPicPr>
         <p:blipFill>
-          <a:blip r:embed="rId9">
+          <a:blip r:embed="rId10">
             <a:extLst>
               <a:ext uri="{28A0092B-C50C-407E-A947-70E740481C1C}">
                 <a14:useLocalDpi xmlns:a14="http://schemas.microsoft.com/office/drawing/2010/main" val="0"/>
@@ -9285,7 +8509,7 @@
             <a:bodyPr/>
             <a:lstStyle/>
             <a:p>
-              <a:endParaRPr lang="en-IN"/>
+              <a:endParaRPr lang="en-IN" dirty="0"/>
             </a:p>
           </p:txBody>
         </p:sp>
@@ -10299,7 +9523,7 @@
         <p:spPr>
           <a:xfrm>
             <a:off x="992991" y="7442968"/>
-            <a:ext cx="8015992" cy="530181"/>
+            <a:ext cx="8015992" cy="869212"/>
           </a:xfrm>
           <a:prstGeom prst="rect">
             <a:avLst/>
@@ -10317,7 +9541,7 @@
               </a:lnSpc>
             </a:pPr>
             <a:r>
-              <a:rPr lang="en-US" sz="2176">
+              <a:rPr lang="en-US" sz="2176" dirty="0">
                 <a:solidFill>
                   <a:srgbClr val="4C4C4D"/>
                 </a:solidFill>
@@ -10326,8 +9550,24 @@
                 <a:cs typeface="Heebo"/>
                 <a:sym typeface="Heebo"/>
               </a:rPr>
-              <a:t>Three-page interactive dashboard walkthrough</a:t>
-            </a:r>
+              <a:t> Interactive dashboard walkthrough with KPIs and Charts</a:t>
+            </a:r>
+          </a:p>
+          <a:p>
+            <a:pPr algn="l">
+              <a:lnSpc>
+                <a:spcPts val="3474"/>
+              </a:lnSpc>
+            </a:pPr>
+            <a:endParaRPr lang="en-US" sz="2176" dirty="0">
+              <a:solidFill>
+                <a:srgbClr val="4C4C4D"/>
+              </a:solidFill>
+              <a:latin typeface="Heebo"/>
+              <a:ea typeface="Heebo"/>
+              <a:cs typeface="Heebo"/>
+              <a:sym typeface="Heebo"/>
+            </a:endParaRPr>
           </a:p>
         </p:txBody>
       </p:sp>
@@ -10922,10 +10162,10 @@
             </a:pathLst>
           </a:custGeom>
           <a:blipFill>
-            <a:blip>
+            <a:blip r:embed="rId4">
               <a:extLst>
                 <a:ext uri="{96DAC541-7B7A-43D3-8B79-37D633B846F1}">
-                  <asvg:svgBlip xmlns:asvg="http://schemas.microsoft.com/office/drawing/2016/SVG/main" r:embed="rId4"/>
+                  <asvg:svgBlip xmlns:asvg="http://schemas.microsoft.com/office/drawing/2016/SVG/main" r:embed="rId5"/>
                 </a:ext>
               </a:extLst>
             </a:blip>
@@ -11087,10 +10327,10 @@
             </a:pathLst>
           </a:custGeom>
           <a:blipFill>
-            <a:blip>
+            <a:blip r:embed="rId4">
               <a:extLst>
                 <a:ext uri="{96DAC541-7B7A-43D3-8B79-37D633B846F1}">
-                  <asvg:svgBlip xmlns:asvg="http://schemas.microsoft.com/office/drawing/2016/SVG/main" r:embed="rId4"/>
+                  <asvg:svgBlip xmlns:asvg="http://schemas.microsoft.com/office/drawing/2016/SVG/main" r:embed="rId5"/>
                 </a:ext>
               </a:extLst>
             </a:blip>
@@ -11252,10 +10492,10 @@
             </a:pathLst>
           </a:custGeom>
           <a:blipFill>
-            <a:blip>
+            <a:blip r:embed="rId4">
               <a:extLst>
                 <a:ext uri="{96DAC541-7B7A-43D3-8B79-37D633B846F1}">
-                  <asvg:svgBlip xmlns:asvg="http://schemas.microsoft.com/office/drawing/2016/SVG/main" r:embed="rId4"/>
+                  <asvg:svgBlip xmlns:asvg="http://schemas.microsoft.com/office/drawing/2016/SVG/main" r:embed="rId5"/>
                 </a:ext>
               </a:extLst>
             </a:blip>
@@ -11393,7 +10633,7 @@
           <p:nvPr/>
         </p:nvPicPr>
         <p:blipFill>
-          <a:blip r:embed="rId5">
+          <a:blip r:embed="rId6">
             <a:extLst>
               <a:ext uri="{28A0092B-C50C-407E-A947-70E740481C1C}">
                 <a14:useLocalDpi xmlns:a14="http://schemas.microsoft.com/office/drawing/2010/main" val="0"/>
@@ -11719,10 +10959,10 @@
             </a:pathLst>
           </a:custGeom>
           <a:blipFill>
-            <a:blip>
+            <a:blip r:embed="rId4">
               <a:extLst>
                 <a:ext uri="{96DAC541-7B7A-43D3-8B79-37D633B846F1}">
-                  <asvg:svgBlip xmlns:asvg="http://schemas.microsoft.com/office/drawing/2016/SVG/main" r:embed="rId4"/>
+                  <asvg:svgBlip xmlns:asvg="http://schemas.microsoft.com/office/drawing/2016/SVG/main" r:embed="rId5"/>
                 </a:ext>
               </a:extLst>
             </a:blip>
@@ -11860,10 +11100,10 @@
             </a:pathLst>
           </a:custGeom>
           <a:blipFill>
-            <a:blip>
+            <a:blip r:embed="rId4">
               <a:extLst>
                 <a:ext uri="{96DAC541-7B7A-43D3-8B79-37D633B846F1}">
-                  <asvg:svgBlip xmlns:asvg="http://schemas.microsoft.com/office/drawing/2016/SVG/main" r:embed="rId4"/>
+                  <asvg:svgBlip xmlns:asvg="http://schemas.microsoft.com/office/drawing/2016/SVG/main" r:embed="rId5"/>
                 </a:ext>
               </a:extLst>
             </a:blip>
@@ -12001,10 +11241,10 @@
             </a:pathLst>
           </a:custGeom>
           <a:blipFill>
-            <a:blip>
+            <a:blip r:embed="rId4">
               <a:extLst>
                 <a:ext uri="{96DAC541-7B7A-43D3-8B79-37D633B846F1}">
-                  <asvg:svgBlip xmlns:asvg="http://schemas.microsoft.com/office/drawing/2016/SVG/main" r:embed="rId4"/>
+                  <asvg:svgBlip xmlns:asvg="http://schemas.microsoft.com/office/drawing/2016/SVG/main" r:embed="rId5"/>
                 </a:ext>
               </a:extLst>
             </a:blip>
@@ -12142,10 +11382,10 @@
             </a:pathLst>
           </a:custGeom>
           <a:blipFill>
-            <a:blip>
+            <a:blip r:embed="rId4">
               <a:extLst>
                 <a:ext uri="{96DAC541-7B7A-43D3-8B79-37D633B846F1}">
-                  <asvg:svgBlip xmlns:asvg="http://schemas.microsoft.com/office/drawing/2016/SVG/main" r:embed="rId4"/>
+                  <asvg:svgBlip xmlns:asvg="http://schemas.microsoft.com/office/drawing/2016/SVG/main" r:embed="rId5"/>
                 </a:ext>
               </a:extLst>
             </a:blip>
@@ -12283,10 +11523,10 @@
             </a:pathLst>
           </a:custGeom>
           <a:blipFill>
-            <a:blip>
+            <a:blip r:embed="rId4">
               <a:extLst>
                 <a:ext uri="{96DAC541-7B7A-43D3-8B79-37D633B846F1}">
-                  <asvg:svgBlip xmlns:asvg="http://schemas.microsoft.com/office/drawing/2016/SVG/main" r:embed="rId4"/>
+                  <asvg:svgBlip xmlns:asvg="http://schemas.microsoft.com/office/drawing/2016/SVG/main" r:embed="rId5"/>
                 </a:ext>
               </a:extLst>
             </a:blip>
@@ -12400,7 +11640,7 @@
           <p:nvPr/>
         </p:nvPicPr>
         <p:blipFill>
-          <a:blip r:embed="rId5">
+          <a:blip r:embed="rId6">
             <a:extLst>
               <a:ext uri="{28A0092B-C50C-407E-A947-70E740481C1C}">
                 <a14:useLocalDpi xmlns:a14="http://schemas.microsoft.com/office/drawing/2010/main" val="0"/>
@@ -13215,10 +12455,10 @@
             </a:pathLst>
           </a:custGeom>
           <a:blipFill>
-            <a:blip>
+            <a:blip r:embed="rId3">
               <a:extLst>
                 <a:ext uri="{96DAC541-7B7A-43D3-8B79-37D633B846F1}">
-                  <asvg:svgBlip xmlns:asvg="http://schemas.microsoft.com/office/drawing/2016/SVG/main" r:embed="rId3"/>
+                  <asvg:svgBlip xmlns:asvg="http://schemas.microsoft.com/office/drawing/2016/SVG/main" r:embed="rId4"/>
                 </a:ext>
               </a:extLst>
             </a:blip>
@@ -13416,10 +12656,10 @@
             </a:pathLst>
           </a:custGeom>
           <a:blipFill>
-            <a:blip>
+            <a:blip r:embed="rId3">
               <a:extLst>
                 <a:ext uri="{96DAC541-7B7A-43D3-8B79-37D633B846F1}">
-                  <asvg:svgBlip xmlns:asvg="http://schemas.microsoft.com/office/drawing/2016/SVG/main" r:embed="rId3"/>
+                  <asvg:svgBlip xmlns:asvg="http://schemas.microsoft.com/office/drawing/2016/SVG/main" r:embed="rId4"/>
                 </a:ext>
               </a:extLst>
             </a:blip>
@@ -13557,10 +12797,10 @@
             </a:pathLst>
           </a:custGeom>
           <a:blipFill>
-            <a:blip>
+            <a:blip r:embed="rId3">
               <a:extLst>
                 <a:ext uri="{96DAC541-7B7A-43D3-8B79-37D633B846F1}">
-                  <asvg:svgBlip xmlns:asvg="http://schemas.microsoft.com/office/drawing/2016/SVG/main" r:embed="rId3"/>
+                  <asvg:svgBlip xmlns:asvg="http://schemas.microsoft.com/office/drawing/2016/SVG/main" r:embed="rId4"/>
                 </a:ext>
               </a:extLst>
             </a:blip>
@@ -13686,7 +12926,7 @@
           <p:nvPr/>
         </p:nvPicPr>
         <p:blipFill>
-          <a:blip r:embed="rId4">
+          <a:blip r:embed="rId5">
             <a:extLst>
               <a:ext uri="{28A0092B-C50C-407E-A947-70E740481C1C}">
                 <a14:useLocalDpi xmlns:a14="http://schemas.microsoft.com/office/drawing/2010/main" val="0"/>
@@ -14959,10 +14199,10 @@
             </a:pathLst>
           </a:custGeom>
           <a:blipFill>
-            <a:blip>
+            <a:blip r:embed="rId4">
               <a:extLst>
                 <a:ext uri="{96DAC541-7B7A-43D3-8B79-37D633B846F1}">
-                  <asvg:svgBlip xmlns:asvg="http://schemas.microsoft.com/office/drawing/2016/SVG/main" r:embed="rId4"/>
+                  <asvg:svgBlip xmlns:asvg="http://schemas.microsoft.com/office/drawing/2016/SVG/main" r:embed="rId5"/>
                 </a:ext>
               </a:extLst>
             </a:blip>
@@ -15100,10 +14340,10 @@
             </a:pathLst>
           </a:custGeom>
           <a:blipFill>
-            <a:blip>
+            <a:blip r:embed="rId6">
               <a:extLst>
                 <a:ext uri="{96DAC541-7B7A-43D3-8B79-37D633B846F1}">
-                  <asvg:svgBlip xmlns:asvg="http://schemas.microsoft.com/office/drawing/2016/SVG/main" r:embed="rId5"/>
+                  <asvg:svgBlip xmlns:asvg="http://schemas.microsoft.com/office/drawing/2016/SVG/main" r:embed="rId7"/>
                 </a:ext>
               </a:extLst>
             </a:blip>
@@ -15241,10 +14481,10 @@
             </a:pathLst>
           </a:custGeom>
           <a:blipFill>
-            <a:blip>
+            <a:blip r:embed="rId8">
               <a:extLst>
                 <a:ext uri="{96DAC541-7B7A-43D3-8B79-37D633B846F1}">
-                  <asvg:svgBlip xmlns:asvg="http://schemas.microsoft.com/office/drawing/2016/SVG/main" r:embed="rId6"/>
+                  <asvg:svgBlip xmlns:asvg="http://schemas.microsoft.com/office/drawing/2016/SVG/main" r:embed="rId9"/>
                 </a:ext>
               </a:extLst>
             </a:blip>
@@ -15382,10 +14622,10 @@
             </a:pathLst>
           </a:custGeom>
           <a:blipFill>
-            <a:blip>
+            <a:blip r:embed="rId10">
               <a:extLst>
                 <a:ext uri="{96DAC541-7B7A-43D3-8B79-37D633B846F1}">
-                  <asvg:svgBlip xmlns:asvg="http://schemas.microsoft.com/office/drawing/2016/SVG/main" r:embed="rId7"/>
+                  <asvg:svgBlip xmlns:asvg="http://schemas.microsoft.com/office/drawing/2016/SVG/main" r:embed="rId11"/>
                 </a:ext>
               </a:extLst>
             </a:blip>
@@ -15499,7 +14739,7 @@
           <p:nvPr/>
         </p:nvPicPr>
         <p:blipFill>
-          <a:blip r:embed="rId8">
+          <a:blip r:embed="rId12">
             <a:extLst>
               <a:ext uri="{28A0092B-C50C-407E-A947-70E740481C1C}">
                 <a14:useLocalDpi xmlns:a14="http://schemas.microsoft.com/office/drawing/2010/main" val="0"/>
@@ -15672,7 +14912,7 @@
             <a:bodyPr/>
             <a:lstStyle/>
             <a:p>
-              <a:endParaRPr lang="en-IN"/>
+              <a:endParaRPr lang="en-IN" dirty="0"/>
             </a:p>
           </p:txBody>
         </p:sp>
@@ -15745,238 +14985,6 @@
           </p:txBody>
         </p:sp>
       </p:grpSp>
-      <p:grpSp>
-        <p:nvGrpSpPr>
-          <p:cNvPr id="8" name="Group 8"/>
-          <p:cNvGrpSpPr/>
-          <p:nvPr/>
-        </p:nvGrpSpPr>
-        <p:grpSpPr>
-          <a:xfrm>
-            <a:off x="10299697" y="2303126"/>
-            <a:ext cx="1361465" cy="366255"/>
-            <a:chOff x="0" y="0"/>
-            <a:chExt cx="1815287" cy="488340"/>
-          </a:xfrm>
-        </p:grpSpPr>
-        <p:sp>
-          <p:nvSpPr>
-            <p:cNvPr id="9" name="Freeform 9"/>
-            <p:cNvSpPr/>
-            <p:nvPr/>
-          </p:nvSpPr>
-          <p:spPr>
-            <a:xfrm>
-              <a:off x="0" y="0"/>
-              <a:ext cx="1815338" cy="488315"/>
-            </a:xfrm>
-            <a:custGeom>
-              <a:avLst/>
-              <a:gdLst/>
-              <a:ahLst/>
-              <a:cxnLst/>
-              <a:rect l="l" t="t" r="r" b="b"/>
-              <a:pathLst>
-                <a:path w="1815338" h="488315">
-                  <a:moveTo>
-                    <a:pt x="0" y="38608"/>
-                  </a:moveTo>
-                  <a:cubicBezTo>
-                    <a:pt x="0" y="17272"/>
-                    <a:pt x="17272" y="0"/>
-                    <a:pt x="38608" y="0"/>
-                  </a:cubicBezTo>
-                  <a:lnTo>
-                    <a:pt x="1776730" y="0"/>
-                  </a:lnTo>
-                  <a:cubicBezTo>
-                    <a:pt x="1798066" y="0"/>
-                    <a:pt x="1815338" y="17272"/>
-                    <a:pt x="1815338" y="38608"/>
-                  </a:cubicBezTo>
-                  <a:lnTo>
-                    <a:pt x="1815338" y="449707"/>
-                  </a:lnTo>
-                  <a:cubicBezTo>
-                    <a:pt x="1815338" y="471043"/>
-                    <a:pt x="1798066" y="488315"/>
-                    <a:pt x="1776730" y="488315"/>
-                  </a:cubicBezTo>
-                  <a:lnTo>
-                    <a:pt x="38608" y="488315"/>
-                  </a:lnTo>
-                  <a:cubicBezTo>
-                    <a:pt x="17272" y="488315"/>
-                    <a:pt x="0" y="471043"/>
-                    <a:pt x="0" y="449707"/>
-                  </a:cubicBezTo>
-                  <a:close/>
-                </a:path>
-              </a:pathLst>
-            </a:custGeom>
-            <a:solidFill>
-              <a:srgbClr val="CCD7FF"/>
-            </a:solidFill>
-          </p:spPr>
-          <p:txBody>
-            <a:bodyPr/>
-            <a:lstStyle/>
-            <a:p>
-              <a:endParaRPr lang="en-IN"/>
-            </a:p>
-          </p:txBody>
-        </p:sp>
-      </p:grpSp>
-      <p:grpSp>
-        <p:nvGrpSpPr>
-          <p:cNvPr id="10" name="Group 10"/>
-          <p:cNvGrpSpPr/>
-          <p:nvPr/>
-        </p:nvGrpSpPr>
-        <p:grpSpPr>
-          <a:xfrm>
-            <a:off x="10299697" y="7850114"/>
-            <a:ext cx="7018534" cy="1202874"/>
-            <a:chOff x="0" y="0"/>
-            <a:chExt cx="9358046" cy="1603832"/>
-          </a:xfrm>
-        </p:grpSpPr>
-        <p:sp>
-          <p:nvSpPr>
-            <p:cNvPr id="11" name="Freeform 11"/>
-            <p:cNvSpPr/>
-            <p:nvPr/>
-          </p:nvSpPr>
-          <p:spPr>
-            <a:xfrm>
-              <a:off x="0" y="0"/>
-              <a:ext cx="9358122" cy="1603883"/>
-            </a:xfrm>
-            <a:custGeom>
-              <a:avLst/>
-              <a:gdLst/>
-              <a:ahLst/>
-              <a:cxnLst/>
-              <a:rect l="l" t="t" r="r" b="b"/>
-              <a:pathLst>
-                <a:path w="9358122" h="1603883">
-                  <a:moveTo>
-                    <a:pt x="0" y="48260"/>
-                  </a:moveTo>
-                  <a:cubicBezTo>
-                    <a:pt x="0" y="21590"/>
-                    <a:pt x="21590" y="0"/>
-                    <a:pt x="48260" y="0"/>
-                  </a:cubicBezTo>
-                  <a:lnTo>
-                    <a:pt x="9309862" y="0"/>
-                  </a:lnTo>
-                  <a:cubicBezTo>
-                    <a:pt x="9336532" y="0"/>
-                    <a:pt x="9358122" y="21590"/>
-                    <a:pt x="9358122" y="48260"/>
-                  </a:cubicBezTo>
-                  <a:lnTo>
-                    <a:pt x="9358122" y="1555623"/>
-                  </a:lnTo>
-                  <a:cubicBezTo>
-                    <a:pt x="9358122" y="1582293"/>
-                    <a:pt x="9336532" y="1603883"/>
-                    <a:pt x="9309862" y="1603883"/>
-                  </a:cubicBezTo>
-                  <a:lnTo>
-                    <a:pt x="48260" y="1603883"/>
-                  </a:lnTo>
-                  <a:cubicBezTo>
-                    <a:pt x="21590" y="1603883"/>
-                    <a:pt x="0" y="1582293"/>
-                    <a:pt x="0" y="1555623"/>
-                  </a:cubicBezTo>
-                  <a:close/>
-                </a:path>
-              </a:pathLst>
-            </a:custGeom>
-            <a:solidFill>
-              <a:srgbClr val="CCD7FF"/>
-            </a:solidFill>
-          </p:spPr>
-          <p:txBody>
-            <a:bodyPr/>
-            <a:lstStyle/>
-            <a:p>
-              <a:endParaRPr lang="en-IN"/>
-            </a:p>
-          </p:txBody>
-        </p:sp>
-      </p:grpSp>
-      <p:grpSp>
-        <p:nvGrpSpPr>
-          <p:cNvPr id="12" name="Group 12"/>
-          <p:cNvGrpSpPr/>
-          <p:nvPr/>
-        </p:nvGrpSpPr>
-        <p:grpSpPr>
-          <a:xfrm>
-            <a:off x="10540832" y="8188223"/>
-            <a:ext cx="301457" cy="241144"/>
-            <a:chOff x="0" y="0"/>
-            <a:chExt cx="401942" cy="321526"/>
-          </a:xfrm>
-        </p:grpSpPr>
-        <p:sp>
-          <p:nvSpPr>
-            <p:cNvPr id="13" name="Freeform 13" descr="preencoded.png"/>
-            <p:cNvSpPr/>
-            <p:nvPr/>
-          </p:nvSpPr>
-          <p:spPr>
-            <a:xfrm>
-              <a:off x="0" y="0"/>
-              <a:ext cx="401955" cy="321564"/>
-            </a:xfrm>
-            <a:custGeom>
-              <a:avLst/>
-              <a:gdLst/>
-              <a:ahLst/>
-              <a:cxnLst/>
-              <a:rect l="l" t="t" r="r" b="b"/>
-              <a:pathLst>
-                <a:path w="401955" h="321564">
-                  <a:moveTo>
-                    <a:pt x="0" y="0"/>
-                  </a:moveTo>
-                  <a:lnTo>
-                    <a:pt x="401955" y="0"/>
-                  </a:lnTo>
-                  <a:lnTo>
-                    <a:pt x="401955" y="321564"/>
-                  </a:lnTo>
-                  <a:lnTo>
-                    <a:pt x="0" y="321564"/>
-                  </a:lnTo>
-                  <a:lnTo>
-                    <a:pt x="0" y="0"/>
-                  </a:lnTo>
-                  <a:close/>
-                </a:path>
-              </a:pathLst>
-            </a:custGeom>
-            <a:blipFill>
-              <a:blip r:embed="rId4"/>
-              <a:stretch>
-                <a:fillRect t="-785" r="3" b="-774"/>
-              </a:stretch>
-            </a:blipFill>
-          </p:spPr>
-          <p:txBody>
-            <a:bodyPr/>
-            <a:lstStyle/>
-            <a:p>
-              <a:endParaRPr lang="en-IN"/>
-            </a:p>
-          </p:txBody>
-        </p:sp>
-      </p:grpSp>
       <p:sp>
         <p:nvSpPr>
           <p:cNvPr id="14" name="TextBox 14"/>
@@ -16020,47 +15028,6 @@
       </p:sp>
       <p:sp>
         <p:nvSpPr>
-          <p:cNvPr id="15" name="TextBox 15"/>
-          <p:cNvSpPr txBox="1"/>
-          <p:nvPr/>
-        </p:nvSpPr>
-        <p:spPr>
-          <a:xfrm>
-            <a:off x="10444324" y="2375364"/>
-            <a:ext cx="1987315" cy="221780"/>
-          </a:xfrm>
-          <a:prstGeom prst="rect">
-            <a:avLst/>
-          </a:prstGeom>
-        </p:spPr>
-        <p:txBody>
-          <a:bodyPr lIns="0" tIns="0" rIns="0" bIns="0" rtlCol="0" anchor="t">
-            <a:spAutoFit/>
-          </a:bodyPr>
-          <a:lstStyle/>
-          <a:p>
-            <a:pPr algn="l">
-              <a:lnSpc>
-                <a:spcPts val="1729"/>
-              </a:lnSpc>
-            </a:pPr>
-            <a:r>
-              <a:rPr lang="en-US" sz="1501">
-                <a:solidFill>
-                  <a:srgbClr val="4C4C4D"/>
-                </a:solidFill>
-                <a:latin typeface="Heebo"/>
-                <a:ea typeface="Heebo"/>
-                <a:cs typeface="Heebo"/>
-                <a:sym typeface="Heebo"/>
-              </a:rPr>
-              <a:t>PAGE 1 OF 3</a:t>
-            </a:r>
-          </a:p>
-        </p:txBody>
-      </p:sp>
-      <p:sp>
-        <p:nvSpPr>
           <p:cNvPr id="16" name="TextBox 16"/>
           <p:cNvSpPr txBox="1"/>
           <p:nvPr/>
@@ -16086,7 +15053,7 @@
               </a:lnSpc>
             </a:pPr>
             <a:r>
-              <a:rPr lang="en-US" sz="2326">
+              <a:rPr lang="en-US" sz="2326" dirty="0">
                 <a:solidFill>
                   <a:srgbClr val="152D47"/>
                 </a:solidFill>
@@ -16364,7 +15331,7 @@
         <p:spPr>
           <a:xfrm>
             <a:off x="10299697" y="7205529"/>
-            <a:ext cx="7933630" cy="414023"/>
+            <a:ext cx="7933630" cy="2852063"/>
           </a:xfrm>
           <a:prstGeom prst="rect">
             <a:avLst/>
@@ -16384,7 +15351,7 @@
               <a:buChar char="•"/>
             </a:pPr>
             <a:r>
-              <a:rPr lang="en-US" sz="1876">
+              <a:rPr lang="en-US" sz="1876" dirty="0">
                 <a:solidFill>
                   <a:srgbClr val="4C4C4D"/>
                 </a:solidFill>
@@ -16396,7 +15363,7 @@
               <a:t>Slicers: </a:t>
             </a:r>
             <a:r>
-              <a:rPr lang="en-US" sz="1876" b="1">
+              <a:rPr lang="en-US" sz="1876" b="1" dirty="0">
                 <a:solidFill>
                   <a:srgbClr val="4C4C4D"/>
                 </a:solidFill>
@@ -16408,46 +15375,90 @@
               <a:t>Department · Job Role · Overtime Status</a:t>
             </a:r>
           </a:p>
-        </p:txBody>
-      </p:sp>
-      <p:sp>
-        <p:nvSpPr>
-          <p:cNvPr id="22" name="TextBox 22"/>
-          <p:cNvSpPr txBox="1"/>
-          <p:nvPr/>
-        </p:nvSpPr>
-        <p:spPr>
-          <a:xfrm>
-            <a:off x="11083423" y="8037538"/>
-            <a:ext cx="5993673" cy="770896"/>
-          </a:xfrm>
-          <a:prstGeom prst="rect">
-            <a:avLst/>
-          </a:prstGeom>
-        </p:spPr>
-        <p:txBody>
-          <a:bodyPr lIns="0" tIns="0" rIns="0" bIns="0" rtlCol="0" anchor="t">
-            <a:spAutoFit/>
-          </a:bodyPr>
-          <a:lstStyle/>
-          <a:p>
-            <a:pPr algn="l">
+          <a:p>
+            <a:pPr marL="339859" lvl="1" indent="-169929">
               <a:lnSpc>
                 <a:spcPts val="2769"/>
               </a:lnSpc>
+              <a:buFont typeface="Arial"/>
+              <a:buChar char="•"/>
             </a:pPr>
             <a:r>
-              <a:rPr lang="en-US" sz="1876">
-                <a:solidFill>
-                  <a:srgbClr val="000000"/>
-                </a:solidFill>
-                <a:latin typeface="Heebo"/>
-                <a:ea typeface="Heebo"/>
-                <a:cs typeface="Heebo"/>
-                <a:sym typeface="Heebo"/>
-              </a:rPr>
-              <a:t>Insert your Power BI screenshot in the image slot on the left.</a:t>
-            </a:r>
+              <a:rPr lang="en-US" sz="2000" dirty="0"/>
+              <a:t>Age Group Filters: </a:t>
+            </a:r>
+            <a:r>
+              <a:rPr lang="en-US" sz="2000" b="1" dirty="0"/>
+              <a:t>30–39 • 40–49 • 50+ • Under 30</a:t>
+            </a:r>
+          </a:p>
+          <a:p>
+            <a:pPr marL="339859" lvl="1" indent="-169929">
+              <a:lnSpc>
+                <a:spcPts val="2769"/>
+              </a:lnSpc>
+              <a:buFont typeface="Arial"/>
+              <a:buChar char="•"/>
+            </a:pPr>
+            <a:r>
+              <a:rPr lang="en-US" sz="2000" b="1" dirty="0"/>
+              <a:t>Department Selection:</a:t>
+            </a:r>
+            <a:r>
+              <a:rPr lang="en-US" sz="2000" dirty="0"/>
+              <a:t> Human Resources, Sales, Research &amp; Development (</a:t>
+            </a:r>
+            <a:r>
+              <a:rPr lang="en-US" sz="2000" dirty="0" err="1"/>
+              <a:t>Treemap</a:t>
+            </a:r>
+            <a:r>
+              <a:rPr lang="en-US" sz="2000" dirty="0"/>
+              <a:t>)</a:t>
+            </a:r>
+          </a:p>
+          <a:p>
+            <a:pPr marL="339859" lvl="1" indent="-169929">
+              <a:lnSpc>
+                <a:spcPts val="2769"/>
+              </a:lnSpc>
+              <a:buFont typeface="Arial"/>
+              <a:buChar char="•"/>
+            </a:pPr>
+            <a:r>
+              <a:rPr lang="en-US" sz="2000" b="1" dirty="0"/>
+              <a:t>Cross-filtering:</a:t>
+            </a:r>
+            <a:r>
+              <a:rPr lang="en-US" sz="2000" dirty="0"/>
+              <a:t> Selecting an age group or department dynamically updates all KPI cards and visualizations on the dashboard.</a:t>
+            </a:r>
+          </a:p>
+          <a:p>
+            <a:pPr marL="339859" lvl="1" indent="-169929">
+              <a:lnSpc>
+                <a:spcPts val="2769"/>
+              </a:lnSpc>
+              <a:buFont typeface="Arial"/>
+              <a:buChar char="•"/>
+            </a:pPr>
+            <a:r>
+              <a:rPr lang="en-US" sz="2000" b="1" dirty="0"/>
+              <a:t>Interactive Dashboard:</a:t>
+            </a:r>
+            <a:r>
+              <a:rPr lang="en-US" sz="2000" dirty="0"/>
+              <a:t> All charts are interconnected, enabling users to explore HR metrics through real-time filtering.</a:t>
+            </a:r>
+            <a:endParaRPr lang="en-US" sz="1876" b="1" dirty="0">
+              <a:solidFill>
+                <a:srgbClr val="4C4C4D"/>
+              </a:solidFill>
+              <a:latin typeface="Heebo Bold"/>
+              <a:ea typeface="Heebo Bold"/>
+              <a:cs typeface="Heebo Bold"/>
+              <a:sym typeface="Heebo Bold"/>
+            </a:endParaRPr>
           </a:p>
         </p:txBody>
       </p:sp>
@@ -16466,7 +15477,7 @@
           <p:nvPr/>
         </p:nvPicPr>
         <p:blipFill>
-          <a:blip r:embed="rId5">
+          <a:blip r:embed="rId4">
             <a:extLst>
               <a:ext uri="{28A0092B-C50C-407E-A947-70E740481C1C}">
                 <a14:useLocalDpi xmlns:a14="http://schemas.microsoft.com/office/drawing/2010/main" val="0"/>

--- a/HR-Employee-Analytics-Dashboard.pptx
+++ b/HR-Employee-Analytics-Dashboard.pptx
@@ -232,7 +232,7 @@
           <a:p>
             <a:fld id="{B7268E1E-0E44-426D-905E-8AD9B19D2182}" type="datetimeFigureOut">
               <a:rPr lang="cs-CZ" smtClean="0"/>
-              <a:t>04.08.2026</a:t>
+              <a:t>12.08.2026</a:t>
             </a:fld>
             <a:endParaRPr lang="cs-CZ"/>
           </a:p>
@@ -3078,7 +3078,7 @@
             <a:fld id="{1D8BD707-D9CF-40AE-B4C6-C98DA3205C09}" type="datetimeFigureOut">
               <a:rPr lang="en-US" smtClean="0"/>
               <a:pPr/>
-              <a:t>8/4/2026</a:t>
+              <a:t>8/12/2026</a:t>
             </a:fld>
             <a:endParaRPr lang="en-US"/>
           </a:p>
@@ -3243,7 +3243,7 @@
             <a:fld id="{1D8BD707-D9CF-40AE-B4C6-C98DA3205C09}" type="datetimeFigureOut">
               <a:rPr lang="en-US" smtClean="0"/>
               <a:pPr/>
-              <a:t>8/4/2026</a:t>
+              <a:t>8/12/2026</a:t>
             </a:fld>
             <a:endParaRPr lang="en-US"/>
           </a:p>
@@ -3418,7 +3418,7 @@
             <a:fld id="{1D8BD707-D9CF-40AE-B4C6-C98DA3205C09}" type="datetimeFigureOut">
               <a:rPr lang="en-US" smtClean="0"/>
               <a:pPr/>
-              <a:t>8/4/2026</a:t>
+              <a:t>8/12/2026</a:t>
             </a:fld>
             <a:endParaRPr lang="en-US"/>
           </a:p>
@@ -3583,7 +3583,7 @@
             <a:fld id="{1D8BD707-D9CF-40AE-B4C6-C98DA3205C09}" type="datetimeFigureOut">
               <a:rPr lang="en-US" smtClean="0"/>
               <a:pPr/>
-              <a:t>8/4/2026</a:t>
+              <a:t>8/12/2026</a:t>
             </a:fld>
             <a:endParaRPr lang="en-US"/>
           </a:p>
@@ -3825,7 +3825,7 @@
             <a:fld id="{1D8BD707-D9CF-40AE-B4C6-C98DA3205C09}" type="datetimeFigureOut">
               <a:rPr lang="en-US" smtClean="0"/>
               <a:pPr/>
-              <a:t>8/4/2026</a:t>
+              <a:t>8/12/2026</a:t>
             </a:fld>
             <a:endParaRPr lang="en-US"/>
           </a:p>
@@ -4107,7 +4107,7 @@
             <a:fld id="{1D8BD707-D9CF-40AE-B4C6-C98DA3205C09}" type="datetimeFigureOut">
               <a:rPr lang="en-US" smtClean="0"/>
               <a:pPr/>
-              <a:t>8/4/2026</a:t>
+              <a:t>8/12/2026</a:t>
             </a:fld>
             <a:endParaRPr lang="en-US"/>
           </a:p>
@@ -4523,7 +4523,7 @@
             <a:fld id="{1D8BD707-D9CF-40AE-B4C6-C98DA3205C09}" type="datetimeFigureOut">
               <a:rPr lang="en-US" smtClean="0"/>
               <a:pPr/>
-              <a:t>8/4/2026</a:t>
+              <a:t>8/12/2026</a:t>
             </a:fld>
             <a:endParaRPr lang="en-US"/>
           </a:p>
@@ -4637,7 +4637,7 @@
             <a:fld id="{1D8BD707-D9CF-40AE-B4C6-C98DA3205C09}" type="datetimeFigureOut">
               <a:rPr lang="en-US" smtClean="0"/>
               <a:pPr/>
-              <a:t>8/4/2026</a:t>
+              <a:t>8/12/2026</a:t>
             </a:fld>
             <a:endParaRPr lang="en-US"/>
           </a:p>
@@ -4729,7 +4729,7 @@
             <a:fld id="{1D8BD707-D9CF-40AE-B4C6-C98DA3205C09}" type="datetimeFigureOut">
               <a:rPr lang="en-US" smtClean="0"/>
               <a:pPr/>
-              <a:t>8/4/2026</a:t>
+              <a:t>8/12/2026</a:t>
             </a:fld>
             <a:endParaRPr lang="en-US"/>
           </a:p>
@@ -5001,7 +5001,7 @@
             <a:fld id="{1D8BD707-D9CF-40AE-B4C6-C98DA3205C09}" type="datetimeFigureOut">
               <a:rPr lang="en-US" smtClean="0"/>
               <a:pPr/>
-              <a:t>8/4/2026</a:t>
+              <a:t>8/12/2026</a:t>
             </a:fld>
             <a:endParaRPr lang="en-US"/>
           </a:p>
@@ -5250,7 +5250,7 @@
             <a:fld id="{1D8BD707-D9CF-40AE-B4C6-C98DA3205C09}" type="datetimeFigureOut">
               <a:rPr lang="en-US" smtClean="0"/>
               <a:pPr/>
-              <a:t>8/4/2026</a:t>
+              <a:t>8/12/2026</a:t>
             </a:fld>
             <a:endParaRPr lang="en-US"/>
           </a:p>
@@ -5458,7 +5458,7 @@
             <a:fld id="{1D8BD707-D9CF-40AE-B4C6-C98DA3205C09}" type="datetimeFigureOut">
               <a:rPr lang="en-US" smtClean="0"/>
               <a:pPr/>
-              <a:t>8/4/2026</a:t>
+              <a:t>8/12/2026</a:t>
             </a:fld>
             <a:endParaRPr lang="en-US"/>
           </a:p>
@@ -6029,100 +6029,6 @@
           </p:txBody>
         </p:sp>
       </p:grpSp>
-      <p:grpSp>
-        <p:nvGrpSpPr>
-          <p:cNvPr id="8" name="Group 8"/>
-          <p:cNvGrpSpPr/>
-          <p:nvPr/>
-        </p:nvGrpSpPr>
-        <p:grpSpPr>
-          <a:xfrm>
-            <a:off x="7851410" y="6413249"/>
-            <a:ext cx="350015" cy="440579"/>
-            <a:chOff x="0" y="0"/>
-            <a:chExt cx="466687" cy="587438"/>
-          </a:xfrm>
-        </p:grpSpPr>
-        <p:sp>
-          <p:nvSpPr>
-            <p:cNvPr id="9" name="Freeform 9"/>
-            <p:cNvSpPr/>
-            <p:nvPr/>
-          </p:nvSpPr>
-          <p:spPr>
-            <a:xfrm>
-              <a:off x="0" y="0"/>
-              <a:ext cx="466852" cy="587502"/>
-            </a:xfrm>
-            <a:custGeom>
-              <a:avLst/>
-              <a:gdLst/>
-              <a:ahLst/>
-              <a:cxnLst/>
-              <a:rect l="l" t="t" r="r" b="b"/>
-              <a:pathLst>
-                <a:path w="466852" h="587502">
-                  <a:moveTo>
-                    <a:pt x="0" y="46736"/>
-                  </a:moveTo>
-                  <a:cubicBezTo>
-                    <a:pt x="0" y="20955"/>
-                    <a:pt x="20955" y="0"/>
-                    <a:pt x="46736" y="0"/>
-                  </a:cubicBezTo>
-                  <a:lnTo>
-                    <a:pt x="420116" y="0"/>
-                  </a:lnTo>
-                  <a:cubicBezTo>
-                    <a:pt x="445897" y="0"/>
-                    <a:pt x="466852" y="20955"/>
-                    <a:pt x="466852" y="46736"/>
-                  </a:cubicBezTo>
-                  <a:lnTo>
-                    <a:pt x="466852" y="540766"/>
-                  </a:lnTo>
-                  <a:cubicBezTo>
-                    <a:pt x="466852" y="566547"/>
-                    <a:pt x="445897" y="587502"/>
-                    <a:pt x="420116" y="587502"/>
-                  </a:cubicBezTo>
-                  <a:lnTo>
-                    <a:pt x="46736" y="587502"/>
-                  </a:lnTo>
-                  <a:cubicBezTo>
-                    <a:pt x="20955" y="587375"/>
-                    <a:pt x="0" y="566547"/>
-                    <a:pt x="0" y="540766"/>
-                  </a:cubicBezTo>
-                  <a:close/>
-                </a:path>
-              </a:pathLst>
-            </a:custGeom>
-            <a:blipFill>
-              <a:blip r:embed="rId4">
-                <a:alphaModFix amt="0"/>
-              </a:blip>
-              <a:stretch>
-                <a:fillRect l="-111461" r="-111426" b="10"/>
-              </a:stretch>
-            </a:blipFill>
-            <a:ln w="9532" cap="sq">
-              <a:solidFill>
-                <a:srgbClr val="2150FE"/>
-              </a:solidFill>
-              <a:prstDash val="solid"/>
-              <a:miter/>
-            </a:ln>
-          </p:spPr>
-          <p:txBody>
-            <a:bodyPr/>
-            <a:lstStyle/>
-            <a:p>
-              <a:endParaRPr lang="en-IN"/>
-            </a:p>
-          </p:txBody>
-        </p:sp>
-      </p:grpSp>
       <p:sp>
         <p:nvSpPr>
           <p:cNvPr id="10" name="TextBox 10"/>
@@ -6220,7 +6126,7 @@
           <p:nvPr/>
         </p:nvPicPr>
         <p:blipFill>
-          <a:blip r:embed="rId5">
+          <a:blip r:embed="rId4">
             <a:extLst>
               <a:ext uri="{28A0092B-C50C-407E-A947-70E740481C1C}">
                 <a14:useLocalDpi xmlns:a14="http://schemas.microsoft.com/office/drawing/2010/main" val="0"/>
@@ -7313,10 +7219,10 @@
             </a:pathLst>
           </a:custGeom>
           <a:blipFill>
-            <a:blip r:embed="rId3">
+            <a:blip>
               <a:extLst>
                 <a:ext uri="{96DAC541-7B7A-43D3-8B79-37D633B846F1}">
-                  <asvg:svgBlip xmlns:asvg="http://schemas.microsoft.com/office/drawing/2016/SVG/main" r:embed="rId4"/>
+                  <asvg:svgBlip xmlns:asvg="http://schemas.microsoft.com/office/drawing/2016/SVG/main" r:embed="rId3"/>
                 </a:ext>
               </a:extLst>
             </a:blip>
@@ -7383,7 +7289,7 @@
               </a:pathLst>
             </a:custGeom>
             <a:blipFill>
-              <a:blip r:embed="rId5">
+              <a:blip r:embed="rId4">
                 <a:alphaModFix amt="0"/>
               </a:blip>
               <a:stretch>
@@ -7560,10 +7466,10 @@
             </a:pathLst>
           </a:custGeom>
           <a:blipFill>
-            <a:blip r:embed="rId3">
+            <a:blip>
               <a:extLst>
                 <a:ext uri="{96DAC541-7B7A-43D3-8B79-37D633B846F1}">
-                  <asvg:svgBlip xmlns:asvg="http://schemas.microsoft.com/office/drawing/2016/SVG/main" r:embed="rId4"/>
+                  <asvg:svgBlip xmlns:asvg="http://schemas.microsoft.com/office/drawing/2016/SVG/main" r:embed="rId3"/>
                 </a:ext>
               </a:extLst>
             </a:blip>
@@ -7630,7 +7536,7 @@
               </a:pathLst>
             </a:custGeom>
             <a:blipFill>
-              <a:blip r:embed="rId5">
+              <a:blip r:embed="rId4">
                 <a:alphaModFix amt="0"/>
               </a:blip>
               <a:stretch>
@@ -7807,10 +7713,10 @@
             </a:pathLst>
           </a:custGeom>
           <a:blipFill>
-            <a:blip r:embed="rId6">
+            <a:blip>
               <a:extLst>
                 <a:ext uri="{96DAC541-7B7A-43D3-8B79-37D633B846F1}">
-                  <asvg:svgBlip xmlns:asvg="http://schemas.microsoft.com/office/drawing/2016/SVG/main" r:embed="rId7"/>
+                  <asvg:svgBlip xmlns:asvg="http://schemas.microsoft.com/office/drawing/2016/SVG/main" r:embed="rId5"/>
                 </a:ext>
               </a:extLst>
             </a:blip>
@@ -7877,7 +7783,7 @@
               </a:pathLst>
             </a:custGeom>
             <a:blipFill>
-              <a:blip r:embed="rId5">
+              <a:blip r:embed="rId4">
                 <a:alphaModFix amt="0"/>
               </a:blip>
               <a:stretch>
@@ -8054,10 +7960,10 @@
             </a:pathLst>
           </a:custGeom>
           <a:blipFill>
-            <a:blip r:embed="rId6">
+            <a:blip>
               <a:extLst>
                 <a:ext uri="{96DAC541-7B7A-43D3-8B79-37D633B846F1}">
-                  <asvg:svgBlip xmlns:asvg="http://schemas.microsoft.com/office/drawing/2016/SVG/main" r:embed="rId7"/>
+                  <asvg:svgBlip xmlns:asvg="http://schemas.microsoft.com/office/drawing/2016/SVG/main" r:embed="rId5"/>
                 </a:ext>
               </a:extLst>
             </a:blip>
@@ -8124,7 +8030,7 @@
               </a:pathLst>
             </a:custGeom>
             <a:blipFill>
-              <a:blip r:embed="rId5">
+              <a:blip r:embed="rId4">
                 <a:alphaModFix amt="0"/>
               </a:blip>
               <a:stretch>
@@ -8301,10 +8207,10 @@
             </a:pathLst>
           </a:custGeom>
           <a:blipFill>
-            <a:blip r:embed="rId8">
+            <a:blip>
               <a:extLst>
                 <a:ext uri="{96DAC541-7B7A-43D3-8B79-37D633B846F1}">
-                  <asvg:svgBlip xmlns:asvg="http://schemas.microsoft.com/office/drawing/2016/SVG/main" r:embed="rId9"/>
+                  <asvg:svgBlip xmlns:asvg="http://schemas.microsoft.com/office/drawing/2016/SVG/main" r:embed="rId6"/>
                 </a:ext>
               </a:extLst>
             </a:blip>
@@ -8336,7 +8242,7 @@
           <p:nvPr/>
         </p:nvPicPr>
         <p:blipFill>
-          <a:blip r:embed="rId10">
+          <a:blip r:embed="rId7">
             <a:extLst>
               <a:ext uri="{28A0092B-C50C-407E-A947-70E740481C1C}">
                 <a14:useLocalDpi xmlns:a14="http://schemas.microsoft.com/office/drawing/2010/main" val="0"/>
@@ -9023,7 +8929,7 @@
         <p:spPr>
           <a:xfrm>
             <a:off x="6526139" y="4762862"/>
-            <a:ext cx="5249418" cy="984171"/>
+            <a:ext cx="5249418" cy="869212"/>
           </a:xfrm>
           <a:prstGeom prst="rect">
             <a:avLst/>
@@ -9041,7 +8947,7 @@
               </a:lnSpc>
             </a:pPr>
             <a:r>
-              <a:rPr lang="en-US" sz="2176">
+              <a:rPr lang="en-US" sz="2176" dirty="0" err="1">
                 <a:solidFill>
                   <a:srgbClr val="4C4C4D"/>
                 </a:solidFill>
@@ -9050,7 +8956,19 @@
                 <a:cs typeface="Heebo"/>
                 <a:sym typeface="Heebo"/>
               </a:rPr>
-              <a:t>IBM HR dataset, Power Query transformations</a:t>
+              <a:t>Nexora</a:t>
+            </a:r>
+            <a:r>
+              <a:rPr lang="en-US" sz="2176" dirty="0">
+                <a:solidFill>
+                  <a:srgbClr val="4C4C4D"/>
+                </a:solidFill>
+                <a:latin typeface="Heebo"/>
+                <a:ea typeface="Heebo"/>
+                <a:cs typeface="Heebo"/>
+                <a:sym typeface="Heebo"/>
+              </a:rPr>
+              <a:t> HR dataset, Power Query transformations</a:t>
             </a:r>
           </a:p>
         </p:txBody>
@@ -10162,10 +10080,10 @@
             </a:pathLst>
           </a:custGeom>
           <a:blipFill>
-            <a:blip r:embed="rId4">
+            <a:blip>
               <a:extLst>
                 <a:ext uri="{96DAC541-7B7A-43D3-8B79-37D633B846F1}">
-                  <asvg:svgBlip xmlns:asvg="http://schemas.microsoft.com/office/drawing/2016/SVG/main" r:embed="rId5"/>
+                  <asvg:svgBlip xmlns:asvg="http://schemas.microsoft.com/office/drawing/2016/SVG/main" r:embed="rId4"/>
                 </a:ext>
               </a:extLst>
             </a:blip>
@@ -10327,10 +10245,10 @@
             </a:pathLst>
           </a:custGeom>
           <a:blipFill>
-            <a:blip r:embed="rId4">
+            <a:blip>
               <a:extLst>
                 <a:ext uri="{96DAC541-7B7A-43D3-8B79-37D633B846F1}">
-                  <asvg:svgBlip xmlns:asvg="http://schemas.microsoft.com/office/drawing/2016/SVG/main" r:embed="rId5"/>
+                  <asvg:svgBlip xmlns:asvg="http://schemas.microsoft.com/office/drawing/2016/SVG/main" r:embed="rId4"/>
                 </a:ext>
               </a:extLst>
             </a:blip>
@@ -10492,10 +10410,10 @@
             </a:pathLst>
           </a:custGeom>
           <a:blipFill>
-            <a:blip r:embed="rId4">
+            <a:blip>
               <a:extLst>
                 <a:ext uri="{96DAC541-7B7A-43D3-8B79-37D633B846F1}">
-                  <asvg:svgBlip xmlns:asvg="http://schemas.microsoft.com/office/drawing/2016/SVG/main" r:embed="rId5"/>
+                  <asvg:svgBlip xmlns:asvg="http://schemas.microsoft.com/office/drawing/2016/SVG/main" r:embed="rId4"/>
                 </a:ext>
               </a:extLst>
             </a:blip>
@@ -10633,7 +10551,7 @@
           <p:nvPr/>
         </p:nvPicPr>
         <p:blipFill>
-          <a:blip r:embed="rId6">
+          <a:blip r:embed="rId5">
             <a:extLst>
               <a:ext uri="{28A0092B-C50C-407E-A947-70E740481C1C}">
                 <a14:useLocalDpi xmlns:a14="http://schemas.microsoft.com/office/drawing/2010/main" val="0"/>
@@ -10959,10 +10877,10 @@
             </a:pathLst>
           </a:custGeom>
           <a:blipFill>
-            <a:blip r:embed="rId4">
+            <a:blip>
               <a:extLst>
                 <a:ext uri="{96DAC541-7B7A-43D3-8B79-37D633B846F1}">
-                  <asvg:svgBlip xmlns:asvg="http://schemas.microsoft.com/office/drawing/2016/SVG/main" r:embed="rId5"/>
+                  <asvg:svgBlip xmlns:asvg="http://schemas.microsoft.com/office/drawing/2016/SVG/main" r:embed="rId4"/>
                 </a:ext>
               </a:extLst>
             </a:blip>
@@ -11100,10 +11018,10 @@
             </a:pathLst>
           </a:custGeom>
           <a:blipFill>
-            <a:blip r:embed="rId4">
+            <a:blip>
               <a:extLst>
                 <a:ext uri="{96DAC541-7B7A-43D3-8B79-37D633B846F1}">
-                  <asvg:svgBlip xmlns:asvg="http://schemas.microsoft.com/office/drawing/2016/SVG/main" r:embed="rId5"/>
+                  <asvg:svgBlip xmlns:asvg="http://schemas.microsoft.com/office/drawing/2016/SVG/main" r:embed="rId4"/>
                 </a:ext>
               </a:extLst>
             </a:blip>
@@ -11241,10 +11159,10 @@
             </a:pathLst>
           </a:custGeom>
           <a:blipFill>
-            <a:blip r:embed="rId4">
+            <a:blip>
               <a:extLst>
                 <a:ext uri="{96DAC541-7B7A-43D3-8B79-37D633B846F1}">
-                  <asvg:svgBlip xmlns:asvg="http://schemas.microsoft.com/office/drawing/2016/SVG/main" r:embed="rId5"/>
+                  <asvg:svgBlip xmlns:asvg="http://schemas.microsoft.com/office/drawing/2016/SVG/main" r:embed="rId4"/>
                 </a:ext>
               </a:extLst>
             </a:blip>
@@ -11382,10 +11300,10 @@
             </a:pathLst>
           </a:custGeom>
           <a:blipFill>
-            <a:blip r:embed="rId4">
+            <a:blip>
               <a:extLst>
                 <a:ext uri="{96DAC541-7B7A-43D3-8B79-37D633B846F1}">
-                  <asvg:svgBlip xmlns:asvg="http://schemas.microsoft.com/office/drawing/2016/SVG/main" r:embed="rId5"/>
+                  <asvg:svgBlip xmlns:asvg="http://schemas.microsoft.com/office/drawing/2016/SVG/main" r:embed="rId4"/>
                 </a:ext>
               </a:extLst>
             </a:blip>
@@ -11523,10 +11441,10 @@
             </a:pathLst>
           </a:custGeom>
           <a:blipFill>
-            <a:blip r:embed="rId4">
+            <a:blip>
               <a:extLst>
                 <a:ext uri="{96DAC541-7B7A-43D3-8B79-37D633B846F1}">
-                  <asvg:svgBlip xmlns:asvg="http://schemas.microsoft.com/office/drawing/2016/SVG/main" r:embed="rId5"/>
+                  <asvg:svgBlip xmlns:asvg="http://schemas.microsoft.com/office/drawing/2016/SVG/main" r:embed="rId4"/>
                 </a:ext>
               </a:extLst>
             </a:blip>
@@ -11640,7 +11558,7 @@
           <p:nvPr/>
         </p:nvPicPr>
         <p:blipFill>
-          <a:blip r:embed="rId6">
+          <a:blip r:embed="rId5">
             <a:extLst>
               <a:ext uri="{28A0092B-C50C-407E-A947-70E740481C1C}">
                 <a14:useLocalDpi xmlns:a14="http://schemas.microsoft.com/office/drawing/2010/main" val="0"/>
@@ -11991,7 +11909,7 @@
         <p:spPr>
           <a:xfrm>
             <a:off x="1234126" y="3195504"/>
-            <a:ext cx="3347142" cy="1127760"/>
+            <a:ext cx="3347142" cy="1059649"/>
           </a:xfrm>
           <a:prstGeom prst="rect">
             <a:avLst/>
@@ -12009,7 +11927,7 @@
               </a:lnSpc>
             </a:pPr>
             <a:r>
-              <a:rPr lang="en-US" sz="1876">
+              <a:rPr lang="en-US" sz="1876" dirty="0" err="1">
                 <a:solidFill>
                   <a:srgbClr val="4C4C4D"/>
                 </a:solidFill>
@@ -12018,7 +11936,19 @@
                 <a:cs typeface="Heebo"/>
                 <a:sym typeface="Heebo"/>
               </a:rPr>
-              <a:t>IBM HR Analytics Employee Attrition Dataset — industry-standard benchmark dataset</a:t>
+              <a:t>Nexora</a:t>
+            </a:r>
+            <a:r>
+              <a:rPr lang="en-US" sz="1876" dirty="0">
+                <a:solidFill>
+                  <a:srgbClr val="4C4C4D"/>
+                </a:solidFill>
+                <a:latin typeface="Heebo"/>
+                <a:ea typeface="Heebo"/>
+                <a:cs typeface="Heebo"/>
+                <a:sym typeface="Heebo"/>
+              </a:rPr>
+              <a:t> HR Analytics Employee Attrition Dataset — industry-standard benchmark dataset</a:t>
             </a:r>
           </a:p>
         </p:txBody>
@@ -12455,10 +12385,10 @@
             </a:pathLst>
           </a:custGeom>
           <a:blipFill>
-            <a:blip r:embed="rId3">
+            <a:blip>
               <a:extLst>
                 <a:ext uri="{96DAC541-7B7A-43D3-8B79-37D633B846F1}">
-                  <asvg:svgBlip xmlns:asvg="http://schemas.microsoft.com/office/drawing/2016/SVG/main" r:embed="rId4"/>
+                  <asvg:svgBlip xmlns:asvg="http://schemas.microsoft.com/office/drawing/2016/SVG/main" r:embed="rId3"/>
                 </a:ext>
               </a:extLst>
             </a:blip>
@@ -12656,10 +12586,10 @@
             </a:pathLst>
           </a:custGeom>
           <a:blipFill>
-            <a:blip r:embed="rId3">
+            <a:blip>
               <a:extLst>
                 <a:ext uri="{96DAC541-7B7A-43D3-8B79-37D633B846F1}">
-                  <asvg:svgBlip xmlns:asvg="http://schemas.microsoft.com/office/drawing/2016/SVG/main" r:embed="rId4"/>
+                  <asvg:svgBlip xmlns:asvg="http://schemas.microsoft.com/office/drawing/2016/SVG/main" r:embed="rId3"/>
                 </a:ext>
               </a:extLst>
             </a:blip>
@@ -12797,10 +12727,10 @@
             </a:pathLst>
           </a:custGeom>
           <a:blipFill>
-            <a:blip r:embed="rId3">
+            <a:blip>
               <a:extLst>
                 <a:ext uri="{96DAC541-7B7A-43D3-8B79-37D633B846F1}">
-                  <asvg:svgBlip xmlns:asvg="http://schemas.microsoft.com/office/drawing/2016/SVG/main" r:embed="rId4"/>
+                  <asvg:svgBlip xmlns:asvg="http://schemas.microsoft.com/office/drawing/2016/SVG/main" r:embed="rId3"/>
                 </a:ext>
               </a:extLst>
             </a:blip>
@@ -12926,7 +12856,7 @@
           <p:nvPr/>
         </p:nvPicPr>
         <p:blipFill>
-          <a:blip r:embed="rId5">
+          <a:blip r:embed="rId4">
             <a:extLst>
               <a:ext uri="{28A0092B-C50C-407E-A947-70E740481C1C}">
                 <a14:useLocalDpi xmlns:a14="http://schemas.microsoft.com/office/drawing/2010/main" val="0"/>
@@ -13240,7 +13170,7 @@
               </a:lnSpc>
             </a:pPr>
             <a:r>
-              <a:rPr lang="en-US" sz="2026">
+              <a:rPr lang="en-US" sz="2026" dirty="0">
                 <a:solidFill>
                   <a:srgbClr val="152D47"/>
                 </a:solidFill>
@@ -14199,10 +14129,10 @@
             </a:pathLst>
           </a:custGeom>
           <a:blipFill>
-            <a:blip r:embed="rId4">
+            <a:blip>
               <a:extLst>
                 <a:ext uri="{96DAC541-7B7A-43D3-8B79-37D633B846F1}">
-                  <asvg:svgBlip xmlns:asvg="http://schemas.microsoft.com/office/drawing/2016/SVG/main" r:embed="rId5"/>
+                  <asvg:svgBlip xmlns:asvg="http://schemas.microsoft.com/office/drawing/2016/SVG/main" r:embed="rId4"/>
                 </a:ext>
               </a:extLst>
             </a:blip>
@@ -14340,10 +14270,10 @@
             </a:pathLst>
           </a:custGeom>
           <a:blipFill>
-            <a:blip r:embed="rId6">
+            <a:blip>
               <a:extLst>
                 <a:ext uri="{96DAC541-7B7A-43D3-8B79-37D633B846F1}">
-                  <asvg:svgBlip xmlns:asvg="http://schemas.microsoft.com/office/drawing/2016/SVG/main" r:embed="rId7"/>
+                  <asvg:svgBlip xmlns:asvg="http://schemas.microsoft.com/office/drawing/2016/SVG/main" r:embed="rId5"/>
                 </a:ext>
               </a:extLst>
             </a:blip>
@@ -14481,10 +14411,10 @@
             </a:pathLst>
           </a:custGeom>
           <a:blipFill>
-            <a:blip r:embed="rId8">
+            <a:blip>
               <a:extLst>
                 <a:ext uri="{96DAC541-7B7A-43D3-8B79-37D633B846F1}">
-                  <asvg:svgBlip xmlns:asvg="http://schemas.microsoft.com/office/drawing/2016/SVG/main" r:embed="rId9"/>
+                  <asvg:svgBlip xmlns:asvg="http://schemas.microsoft.com/office/drawing/2016/SVG/main" r:embed="rId6"/>
                 </a:ext>
               </a:extLst>
             </a:blip>
@@ -14622,10 +14552,10 @@
             </a:pathLst>
           </a:custGeom>
           <a:blipFill>
-            <a:blip r:embed="rId10">
+            <a:blip>
               <a:extLst>
                 <a:ext uri="{96DAC541-7B7A-43D3-8B79-37D633B846F1}">
-                  <asvg:svgBlip xmlns:asvg="http://schemas.microsoft.com/office/drawing/2016/SVG/main" r:embed="rId11"/>
+                  <asvg:svgBlip xmlns:asvg="http://schemas.microsoft.com/office/drawing/2016/SVG/main" r:embed="rId7"/>
                 </a:ext>
               </a:extLst>
             </a:blip>
@@ -14710,7 +14640,7 @@
               </a:lnSpc>
             </a:pPr>
             <a:r>
-              <a:rPr lang="en-US" sz="1951">
+              <a:rPr lang="en-US" sz="1951" dirty="0">
                 <a:solidFill>
                   <a:srgbClr val="4C4C4D"/>
                 </a:solidFill>
@@ -14739,7 +14669,7 @@
           <p:nvPr/>
         </p:nvPicPr>
         <p:blipFill>
-          <a:blip r:embed="rId12">
+          <a:blip r:embed="rId8">
             <a:extLst>
               <a:ext uri="{28A0092B-C50C-407E-A947-70E740481C1C}">
                 <a14:useLocalDpi xmlns:a14="http://schemas.microsoft.com/office/drawing/2010/main" val="0"/>

--- a/HR-Employee-Analytics-Dashboard.pptx
+++ b/HR-Employee-Analytics-Dashboard.pptx
@@ -6038,7 +6038,7 @@
         <p:spPr>
           <a:xfrm>
             <a:off x="7856182" y="3398358"/>
-            <a:ext cx="9452677" cy="1820961"/>
+            <a:ext cx="9452677" cy="1713739"/>
           </a:xfrm>
           <a:prstGeom prst="rect">
             <a:avLst/>
@@ -6056,7 +6056,7 @@
               </a:lnSpc>
             </a:pPr>
             <a:r>
-              <a:rPr lang="en-US" sz="5554">
+              <a:rPr lang="en-US" sz="5554" dirty="0" err="1">
                 <a:solidFill>
                   <a:srgbClr val="152D47"/>
                 </a:solidFill>
@@ -6065,7 +6065,19 @@
                 <a:cs typeface="Crimson Pro"/>
                 <a:sym typeface="Crimson Pro"/>
               </a:rPr>
-              <a:t>HR Employee Analytics Dashboard</a:t>
+              <a:t>Nexora</a:t>
+            </a:r>
+            <a:r>
+              <a:rPr lang="en-US" sz="5554" dirty="0">
+                <a:solidFill>
+                  <a:srgbClr val="152D47"/>
+                </a:solidFill>
+                <a:latin typeface="Crimson Pro"/>
+                <a:ea typeface="Crimson Pro"/>
+                <a:cs typeface="Crimson Pro"/>
+                <a:sym typeface="Crimson Pro"/>
+              </a:rPr>
+              <a:t> HR Employee Analytics Dashboard</a:t>
             </a:r>
           </a:p>
         </p:txBody>
@@ -14847,74 +14859,6 @@
           </p:txBody>
         </p:sp>
       </p:grpSp>
-      <p:grpSp>
-        <p:nvGrpSpPr>
-          <p:cNvPr id="6" name="Group 6"/>
-          <p:cNvGrpSpPr/>
-          <p:nvPr/>
-        </p:nvGrpSpPr>
-        <p:grpSpPr>
-          <a:xfrm>
-            <a:off x="1646091" y="3596116"/>
-            <a:ext cx="7402506" cy="4163892"/>
-            <a:chOff x="0" y="0"/>
-            <a:chExt cx="9870008" cy="5551856"/>
-          </a:xfrm>
-        </p:grpSpPr>
-        <p:sp>
-          <p:nvSpPr>
-            <p:cNvPr id="7" name="Freeform 7"/>
-            <p:cNvSpPr/>
-            <p:nvPr/>
-          </p:nvSpPr>
-          <p:spPr>
-            <a:xfrm>
-              <a:off x="0" y="0"/>
-              <a:ext cx="9870059" cy="5551805"/>
-            </a:xfrm>
-            <a:custGeom>
-              <a:avLst/>
-              <a:gdLst/>
-              <a:ahLst/>
-              <a:cxnLst/>
-              <a:rect l="l" t="t" r="r" b="b"/>
-              <a:pathLst>
-                <a:path w="9870059" h="5551805">
-                  <a:moveTo>
-                    <a:pt x="0" y="0"/>
-                  </a:moveTo>
-                  <a:lnTo>
-                    <a:pt x="9870059" y="0"/>
-                  </a:lnTo>
-                  <a:lnTo>
-                    <a:pt x="9870059" y="5551805"/>
-                  </a:lnTo>
-                  <a:lnTo>
-                    <a:pt x="0" y="5551805"/>
-                  </a:lnTo>
-                  <a:lnTo>
-                    <a:pt x="0" y="0"/>
-                  </a:lnTo>
-                  <a:close/>
-                </a:path>
-              </a:pathLst>
-            </a:custGeom>
-            <a:blipFill>
-              <a:blip r:embed="rId3"/>
-              <a:stretch>
-                <a:fillRect t="-251" b="-251"/>
-              </a:stretch>
-            </a:blipFill>
-          </p:spPr>
-          <p:txBody>
-            <a:bodyPr/>
-            <a:lstStyle/>
-            <a:p>
-              <a:endParaRPr lang="en-IN"/>
-            </a:p>
-          </p:txBody>
-        </p:sp>
-      </p:grpSp>
       <p:sp>
         <p:nvSpPr>
           <p:cNvPr id="14" name="TextBox 14"/>
@@ -15398,6 +15342,42 @@
             <a:extLst>
               <a:ext uri="{FF2B5EF4-FFF2-40B4-BE49-F238E27FC236}">
                 <a16:creationId xmlns:a16="http://schemas.microsoft.com/office/drawing/2014/main" id="{CCBC7EE7-58CC-1363-4BBD-D0212D0DA5F5}"/>
+              </a:ext>
+            </a:extLst>
+          </p:cNvPr>
+          <p:cNvPicPr>
+            <a:picLocks noChangeAspect="1"/>
+          </p:cNvPicPr>
+          <p:nvPr/>
+        </p:nvPicPr>
+        <p:blipFill>
+          <a:blip r:embed="rId3">
+            <a:extLst>
+              <a:ext uri="{28A0092B-C50C-407E-A947-70E740481C1C}">
+                <a14:useLocalDpi xmlns:a14="http://schemas.microsoft.com/office/drawing/2010/main" val="0"/>
+              </a:ext>
+            </a:extLst>
+          </a:blip>
+          <a:stretch>
+            <a:fillRect/>
+          </a:stretch>
+        </p:blipFill>
+        <p:spPr>
+          <a:xfrm>
+            <a:off x="14859000" y="342900"/>
+            <a:ext cx="3113695" cy="910157"/>
+          </a:xfrm>
+          <a:prstGeom prst="rect">
+            <a:avLst/>
+          </a:prstGeom>
+        </p:spPr>
+      </p:pic>
+      <p:pic>
+        <p:nvPicPr>
+          <p:cNvPr id="9" name="Picture 8">
+            <a:extLst>
+              <a:ext uri="{FF2B5EF4-FFF2-40B4-BE49-F238E27FC236}">
+                <a16:creationId xmlns:a16="http://schemas.microsoft.com/office/drawing/2014/main" id="{8F406AC8-C2D0-3C03-22F5-3ADE6A09BCD6}"/>
               </a:ext>
             </a:extLst>
           </p:cNvPr>
@@ -15420,8 +15400,8 @@
         </p:blipFill>
         <p:spPr>
           <a:xfrm>
-            <a:off x="14859000" y="342900"/>
-            <a:ext cx="3113695" cy="910157"/>
+            <a:off x="957479" y="3112485"/>
+            <a:ext cx="8756941" cy="4926615"/>
           </a:xfrm>
           <a:prstGeom prst="rect">
             <a:avLst/>
@@ -15667,74 +15647,6 @@
           </p:txBody>
         </p:sp>
       </p:grpSp>
-      <p:grpSp>
-        <p:nvGrpSpPr>
-          <p:cNvPr id="8" name="Group 8"/>
-          <p:cNvGrpSpPr/>
-          <p:nvPr/>
-        </p:nvGrpSpPr>
-        <p:grpSpPr>
-          <a:xfrm>
-            <a:off x="9466231" y="3675202"/>
-            <a:ext cx="6979510" cy="3926024"/>
-            <a:chOff x="0" y="0"/>
-            <a:chExt cx="9306014" cy="5234699"/>
-          </a:xfrm>
-        </p:grpSpPr>
-        <p:sp>
-          <p:nvSpPr>
-            <p:cNvPr id="9" name="Freeform 9"/>
-            <p:cNvSpPr/>
-            <p:nvPr/>
-          </p:nvSpPr>
-          <p:spPr>
-            <a:xfrm>
-              <a:off x="0" y="0"/>
-              <a:ext cx="9306052" cy="5234686"/>
-            </a:xfrm>
-            <a:custGeom>
-              <a:avLst/>
-              <a:gdLst/>
-              <a:ahLst/>
-              <a:cxnLst/>
-              <a:rect l="l" t="t" r="r" b="b"/>
-              <a:pathLst>
-                <a:path w="9306052" h="5234686">
-                  <a:moveTo>
-                    <a:pt x="0" y="0"/>
-                  </a:moveTo>
-                  <a:lnTo>
-                    <a:pt x="9306052" y="0"/>
-                  </a:lnTo>
-                  <a:lnTo>
-                    <a:pt x="9306052" y="5234686"/>
-                  </a:lnTo>
-                  <a:lnTo>
-                    <a:pt x="0" y="5234686"/>
-                  </a:lnTo>
-                  <a:lnTo>
-                    <a:pt x="0" y="0"/>
-                  </a:lnTo>
-                  <a:close/>
-                </a:path>
-              </a:pathLst>
-            </a:custGeom>
-            <a:blipFill>
-              <a:blip r:embed="rId3"/>
-              <a:stretch>
-                <a:fillRect l="-204" r="-204"/>
-              </a:stretch>
-            </a:blipFill>
-          </p:spPr>
-          <p:txBody>
-            <a:bodyPr/>
-            <a:lstStyle/>
-            <a:p>
-              <a:endParaRPr lang="en-IN"/>
-            </a:p>
-          </p:txBody>
-        </p:sp>
-      </p:grpSp>
       <p:sp>
         <p:nvSpPr>
           <p:cNvPr id="10" name="TextBox 10"/>
@@ -16175,6 +16087,42 @@
             <a:extLst>
               <a:ext uri="{FF2B5EF4-FFF2-40B4-BE49-F238E27FC236}">
                 <a16:creationId xmlns:a16="http://schemas.microsoft.com/office/drawing/2014/main" id="{2C933427-B28F-B226-17AA-5742BD619470}"/>
+              </a:ext>
+            </a:extLst>
+          </p:cNvPr>
+          <p:cNvPicPr>
+            <a:picLocks noChangeAspect="1"/>
+          </p:cNvPicPr>
+          <p:nvPr/>
+        </p:nvPicPr>
+        <p:blipFill>
+          <a:blip r:embed="rId3">
+            <a:extLst>
+              <a:ext uri="{28A0092B-C50C-407E-A947-70E740481C1C}">
+                <a14:useLocalDpi xmlns:a14="http://schemas.microsoft.com/office/drawing/2010/main" val="0"/>
+              </a:ext>
+            </a:extLst>
+          </a:blip>
+          <a:stretch>
+            <a:fillRect/>
+          </a:stretch>
+        </p:blipFill>
+        <p:spPr>
+          <a:xfrm>
+            <a:off x="14859000" y="342900"/>
+            <a:ext cx="3113695" cy="910157"/>
+          </a:xfrm>
+          <a:prstGeom prst="rect">
+            <a:avLst/>
+          </a:prstGeom>
+        </p:spPr>
+      </p:pic>
+      <p:pic>
+        <p:nvPicPr>
+          <p:cNvPr id="24" name="Picture 23">
+            <a:extLst>
+              <a:ext uri="{FF2B5EF4-FFF2-40B4-BE49-F238E27FC236}">
+                <a16:creationId xmlns:a16="http://schemas.microsoft.com/office/drawing/2014/main" id="{924F7923-B8BF-C031-D00E-CF87C88BC3E1}"/>
               </a:ext>
             </a:extLst>
           </p:cNvPr>
@@ -16197,8 +16145,8 @@
         </p:blipFill>
         <p:spPr>
           <a:xfrm>
-            <a:off x="14859000" y="342900"/>
-            <a:ext cx="3113695" cy="910157"/>
+            <a:off x="8686800" y="2621121"/>
+            <a:ext cx="8852340" cy="4946498"/>
           </a:xfrm>
           <a:prstGeom prst="rect">
             <a:avLst/>

--- a/HR-Employee-Analytics-Dashboard.pptx
+++ b/HR-Employee-Analytics-Dashboard.pptx
@@ -5,7 +5,7 @@
     <p:sldMasterId id="2147483648" r:id="rId1"/>
   </p:sldMasterIdLst>
   <p:notesMasterIdLst>
-    <p:notesMasterId r:id="rId13"/>
+    <p:notesMasterId r:id="rId14"/>
   </p:notesMasterIdLst>
   <p:sldIdLst>
     <p:sldId id="256" r:id="rId2"/>
@@ -17,23 +17,24 @@
     <p:sldId id="262" r:id="rId8"/>
     <p:sldId id="263" r:id="rId9"/>
     <p:sldId id="264" r:id="rId10"/>
-    <p:sldId id="265" r:id="rId11"/>
-    <p:sldId id="266" r:id="rId12"/>
+    <p:sldId id="267" r:id="rId11"/>
+    <p:sldId id="265" r:id="rId12"/>
+    <p:sldId id="266" r:id="rId13"/>
   </p:sldIdLst>
   <p:sldSz cx="18288000" cy="10287000"/>
   <p:notesSz cx="6858000" cy="9144000"/>
   <p:embeddedFontLst>
     <p:embeddedFont>
       <p:font typeface="Crimson Pro" panose="020B0604020202020204" charset="0"/>
-      <p:regular r:id="rId14"/>
+      <p:regular r:id="rId15"/>
     </p:embeddedFont>
     <p:embeddedFont>
       <p:font typeface="Heebo" pitchFamily="2" charset="-79"/>
-      <p:regular r:id="rId15"/>
+      <p:regular r:id="rId16"/>
     </p:embeddedFont>
     <p:embeddedFont>
       <p:font typeface="Heebo Bold" panose="020B0604020202020204" charset="-79"/>
-      <p:regular r:id="rId16"/>
+      <p:regular r:id="rId17"/>
     </p:embeddedFont>
   </p:embeddedFontLst>
   <p:defaultTextStyle>
@@ -232,7 +233,7 @@
           <a:p>
             <a:fld id="{B7268E1E-0E44-426D-905E-8AD9B19D2182}" type="datetimeFigureOut">
               <a:rPr lang="cs-CZ" smtClean="0"/>
-              <a:t>12.08.2026</a:t>
+              <a:t>17.08.2026</a:t>
             </a:fld>
             <a:endParaRPr lang="cs-CZ"/>
           </a:p>
@@ -723,6 +724,271 @@
   <p:cSld>
     <p:spTree>
       <p:nvGrpSpPr>
+        <p:cNvPr id="1" name="">
+          <a:extLst>
+            <a:ext uri="{FF2B5EF4-FFF2-40B4-BE49-F238E27FC236}">
+              <a16:creationId xmlns:a16="http://schemas.microsoft.com/office/drawing/2014/main" id="{DFCCABA7-CCC7-737F-858D-76CCB4D91346}"/>
+            </a:ext>
+          </a:extLst>
+        </p:cNvPr>
+        <p:cNvGrpSpPr/>
+        <p:nvPr/>
+      </p:nvGrpSpPr>
+      <p:grpSpPr>
+        <a:xfrm>
+          <a:off x="0" y="0"/>
+          <a:ext cx="0" cy="0"/>
+          <a:chOff x="0" y="0"/>
+          <a:chExt cx="0" cy="0"/>
+        </a:xfrm>
+      </p:grpSpPr>
+      <p:sp>
+        <p:nvSpPr>
+          <p:cNvPr id="2" name="Header Placeholder 1">
+            <a:extLst>
+              <a:ext uri="{FF2B5EF4-FFF2-40B4-BE49-F238E27FC236}">
+                <a16:creationId xmlns:a16="http://schemas.microsoft.com/office/drawing/2014/main" id="{B1C22368-136D-5862-4C63-49B72EB27FA2}"/>
+              </a:ext>
+            </a:extLst>
+          </p:cNvPr>
+          <p:cNvSpPr>
+            <a:spLocks noGrp="1"/>
+          </p:cNvSpPr>
+          <p:nvPr>
+            <p:ph type="hdr" sz="quarter"/>
+          </p:nvPr>
+        </p:nvSpPr>
+        <p:spPr>
+          <a:xfrm>
+            <a:off x="0" y="0"/>
+            <a:ext cx="3962400" cy="342900"/>
+          </a:xfrm>
+          <a:prstGeom prst="rect">
+            <a:avLst/>
+          </a:prstGeom>
+        </p:spPr>
+        <p:txBody>
+          <a:bodyPr vert="horz" lIns="91440" tIns="45720" rIns="91440" bIns="45720" rtlCol="0"/>
+          <a:lstStyle>
+            <a:lvl1pPr algn="l">
+              <a:defRPr sz="1200"/>
+            </a:lvl1pPr>
+          </a:lstStyle>
+          <a:p>
+            <a:endParaRPr/>
+          </a:p>
+        </p:txBody>
+      </p:sp>
+      <p:sp>
+        <p:nvSpPr>
+          <p:cNvPr id="3" name="Date Placeholder 2">
+            <a:extLst>
+              <a:ext uri="{FF2B5EF4-FFF2-40B4-BE49-F238E27FC236}">
+                <a16:creationId xmlns:a16="http://schemas.microsoft.com/office/drawing/2014/main" id="{9C2989DD-7D0D-031F-3E8E-A742A3AE2038}"/>
+              </a:ext>
+            </a:extLst>
+          </p:cNvPr>
+          <p:cNvSpPr>
+            <a:spLocks noGrp="1"/>
+          </p:cNvSpPr>
+          <p:nvPr>
+            <p:ph type="dt" idx="1"/>
+          </p:nvPr>
+        </p:nvSpPr>
+        <p:spPr>
+          <a:xfrm>
+            <a:off x="5180013" y="0"/>
+            <a:ext cx="3962400" cy="342900"/>
+          </a:xfrm>
+          <a:prstGeom prst="rect">
+            <a:avLst/>
+          </a:prstGeom>
+        </p:spPr>
+        <p:txBody>
+          <a:bodyPr vert="horz" lIns="91440" tIns="45720" rIns="91440" bIns="45720" rtlCol="0"/>
+          <a:lstStyle>
+            <a:lvl1pPr algn="r">
+              <a:defRPr sz="1200"/>
+            </a:lvl1pPr>
+          </a:lstStyle>
+          <a:p>
+            <a:r>
+              <a:rPr lang="cs-CZ"/>
+              <a:t>1.7.2013</a:t>
+            </a:r>
+          </a:p>
+        </p:txBody>
+      </p:sp>
+      <p:sp>
+        <p:nvSpPr>
+          <p:cNvPr id="4" name="Slide Image Placeholder 3">
+            <a:extLst>
+              <a:ext uri="{FF2B5EF4-FFF2-40B4-BE49-F238E27FC236}">
+                <a16:creationId xmlns:a16="http://schemas.microsoft.com/office/drawing/2014/main" id="{F129F3A0-123C-D503-F0B5-DD1FBCC0EAE9}"/>
+              </a:ext>
+            </a:extLst>
+          </p:cNvPr>
+          <p:cNvSpPr>
+            <a:spLocks noGrp="1" noRot="1" noChangeAspect="1"/>
+          </p:cNvSpPr>
+          <p:nvPr>
+            <p:ph type="sldImg" idx="2"/>
+          </p:nvPr>
+        </p:nvSpPr>
+        <p:spPr>
+          <a:xfrm>
+            <a:off x="2290763" y="512763"/>
+            <a:ext cx="4562475" cy="2566987"/>
+          </a:xfrm>
+          <a:prstGeom prst="rect">
+            <a:avLst/>
+          </a:prstGeom>
+          <a:noFill/>
+          <a:ln w="12700">
+            <a:solidFill>
+              <a:prstClr val="black"/>
+            </a:solidFill>
+          </a:ln>
+        </p:spPr>
+        <p:txBody>
+          <a:bodyPr vert="horz" lIns="91440" tIns="45720" rIns="91440" bIns="45720" rtlCol="0" anchor="ctr"/>
+          <a:lstStyle/>
+          <a:p>
+            <a:endParaRPr/>
+          </a:p>
+        </p:txBody>
+      </p:sp>
+      <p:sp>
+        <p:nvSpPr>
+          <p:cNvPr id="5" name="Notes Placeholder 4">
+            <a:extLst>
+              <a:ext uri="{FF2B5EF4-FFF2-40B4-BE49-F238E27FC236}">
+                <a16:creationId xmlns:a16="http://schemas.microsoft.com/office/drawing/2014/main" id="{EF58F1EF-876D-0B0F-C342-D6BBD62387FE}"/>
+              </a:ext>
+            </a:extLst>
+          </p:cNvPr>
+          <p:cNvSpPr>
+            <a:spLocks noGrp="1"/>
+          </p:cNvSpPr>
+          <p:nvPr>
+            <p:ph type="body" sz="quarter" idx="3"/>
+          </p:nvPr>
+        </p:nvSpPr>
+        <p:spPr>
+          <a:xfrm>
+            <a:off x="914400" y="3251200"/>
+            <a:ext cx="7315200" cy="3081338"/>
+          </a:xfrm>
+          <a:prstGeom prst="rect">
+            <a:avLst/>
+          </a:prstGeom>
+        </p:spPr>
+        <p:txBody>
+          <a:bodyPr vert="horz" lIns="91440" tIns="45720" rIns="91440" bIns="45720" rtlCol="0"/>
+          <a:lstStyle/>
+          <a:p>
+            <a:r>
+              <a:rPr lang="en-US"/>
+              <a:t>9</a:t>
+            </a:r>
+          </a:p>
+        </p:txBody>
+      </p:sp>
+      <p:sp>
+        <p:nvSpPr>
+          <p:cNvPr id="6" name="Footer Placeholder 5">
+            <a:extLst>
+              <a:ext uri="{FF2B5EF4-FFF2-40B4-BE49-F238E27FC236}">
+                <a16:creationId xmlns:a16="http://schemas.microsoft.com/office/drawing/2014/main" id="{4D323740-2EC5-6754-E152-74A4B1F6B982}"/>
+              </a:ext>
+            </a:extLst>
+          </p:cNvPr>
+          <p:cNvSpPr>
+            <a:spLocks noGrp="1"/>
+          </p:cNvSpPr>
+          <p:nvPr>
+            <p:ph type="ftr" sz="quarter" idx="4"/>
+          </p:nvPr>
+        </p:nvSpPr>
+        <p:spPr>
+          <a:xfrm>
+            <a:off x="0" y="6502400"/>
+            <a:ext cx="3962400" cy="341313"/>
+          </a:xfrm>
+          <a:prstGeom prst="rect">
+            <a:avLst/>
+          </a:prstGeom>
+        </p:spPr>
+        <p:txBody>
+          <a:bodyPr vert="horz" lIns="91440" tIns="45720" rIns="91440" bIns="45720" rtlCol="0" anchor="b"/>
+          <a:lstStyle>
+            <a:lvl1pPr algn="l">
+              <a:defRPr sz="1200"/>
+            </a:lvl1pPr>
+          </a:lstStyle>
+          <a:p>
+            <a:endParaRPr/>
+          </a:p>
+        </p:txBody>
+      </p:sp>
+      <p:sp>
+        <p:nvSpPr>
+          <p:cNvPr id="7" name="Slide Number Placeholder 6">
+            <a:extLst>
+              <a:ext uri="{FF2B5EF4-FFF2-40B4-BE49-F238E27FC236}">
+                <a16:creationId xmlns:a16="http://schemas.microsoft.com/office/drawing/2014/main" id="{6CA24948-0E06-A598-D4F4-6D2983AE5616}"/>
+              </a:ext>
+            </a:extLst>
+          </p:cNvPr>
+          <p:cNvSpPr>
+            <a:spLocks noGrp="1"/>
+          </p:cNvSpPr>
+          <p:nvPr>
+            <p:ph type="sldNum" sz="quarter" idx="5"/>
+          </p:nvPr>
+        </p:nvSpPr>
+        <p:spPr>
+          <a:xfrm>
+            <a:off x="5180013" y="6502400"/>
+            <a:ext cx="3962400" cy="341313"/>
+          </a:xfrm>
+          <a:prstGeom prst="rect">
+            <a:avLst/>
+          </a:prstGeom>
+        </p:spPr>
+        <p:txBody>
+          <a:bodyPr vert="horz" lIns="91440" tIns="45720" rIns="91440" bIns="45720" rtlCol="0" anchor="b"/>
+          <a:lstStyle>
+            <a:lvl1pPr algn="r">
+              <a:defRPr sz="1200"/>
+            </a:lvl1pPr>
+          </a:lstStyle>
+          <a:p>
+            <a:r>
+              <a:rPr lang="cs-CZ"/>
+              <a:t>‹#›</a:t>
+            </a:r>
+          </a:p>
+        </p:txBody>
+      </p:sp>
+    </p:spTree>
+    <p:extLst>
+      <p:ext uri="{BB962C8B-B14F-4D97-AF65-F5344CB8AC3E}">
+        <p14:creationId xmlns:p14="http://schemas.microsoft.com/office/powerpoint/2010/main" val="1578487221"/>
+      </p:ext>
+    </p:extLst>
+  </p:cSld>
+  <p:clrMapOvr>
+    <a:masterClrMapping/>
+  </p:clrMapOvr>
+</p:notes>
+</file>
+
+<file path=ppt/notesSlides/notesSlide11.xml><?xml version="1.0" encoding="utf-8"?>
+<p:notes xmlns:a="http://schemas.openxmlformats.org/drawingml/2006/main" xmlns:r="http://schemas.openxmlformats.org/officeDocument/2006/relationships" xmlns:p="http://schemas.openxmlformats.org/presentationml/2006/main">
+  <p:cSld>
+    <p:spTree>
+      <p:nvGrpSpPr>
         <p:cNvPr id="1" name=""/>
         <p:cNvGrpSpPr/>
         <p:nvPr/>
@@ -936,7 +1202,7 @@
 </p:notes>
 </file>
 
-<file path=ppt/notesSlides/notesSlide11.xml><?xml version="1.0" encoding="utf-8"?>
+<file path=ppt/notesSlides/notesSlide12.xml><?xml version="1.0" encoding="utf-8"?>
 <p:notes xmlns:a="http://schemas.openxmlformats.org/drawingml/2006/main" xmlns:r="http://schemas.openxmlformats.org/officeDocument/2006/relationships" xmlns:p="http://schemas.openxmlformats.org/presentationml/2006/main">
   <p:cSld>
     <p:spTree>
@@ -3078,7 +3344,7 @@
             <a:fld id="{1D8BD707-D9CF-40AE-B4C6-C98DA3205C09}" type="datetimeFigureOut">
               <a:rPr lang="en-US" smtClean="0"/>
               <a:pPr/>
-              <a:t>8/12/2026</a:t>
+              <a:t>8/17/2026</a:t>
             </a:fld>
             <a:endParaRPr lang="en-US"/>
           </a:p>
@@ -3243,7 +3509,7 @@
             <a:fld id="{1D8BD707-D9CF-40AE-B4C6-C98DA3205C09}" type="datetimeFigureOut">
               <a:rPr lang="en-US" smtClean="0"/>
               <a:pPr/>
-              <a:t>8/12/2026</a:t>
+              <a:t>8/17/2026</a:t>
             </a:fld>
             <a:endParaRPr lang="en-US"/>
           </a:p>
@@ -3418,7 +3684,7 @@
             <a:fld id="{1D8BD707-D9CF-40AE-B4C6-C98DA3205C09}" type="datetimeFigureOut">
               <a:rPr lang="en-US" smtClean="0"/>
               <a:pPr/>
-              <a:t>8/12/2026</a:t>
+              <a:t>8/17/2026</a:t>
             </a:fld>
             <a:endParaRPr lang="en-US"/>
           </a:p>
@@ -3583,7 +3849,7 @@
             <a:fld id="{1D8BD707-D9CF-40AE-B4C6-C98DA3205C09}" type="datetimeFigureOut">
               <a:rPr lang="en-US" smtClean="0"/>
               <a:pPr/>
-              <a:t>8/12/2026</a:t>
+              <a:t>8/17/2026</a:t>
             </a:fld>
             <a:endParaRPr lang="en-US"/>
           </a:p>
@@ -3825,7 +4091,7 @@
             <a:fld id="{1D8BD707-D9CF-40AE-B4C6-C98DA3205C09}" type="datetimeFigureOut">
               <a:rPr lang="en-US" smtClean="0"/>
               <a:pPr/>
-              <a:t>8/12/2026</a:t>
+              <a:t>8/17/2026</a:t>
             </a:fld>
             <a:endParaRPr lang="en-US"/>
           </a:p>
@@ -4107,7 +4373,7 @@
             <a:fld id="{1D8BD707-D9CF-40AE-B4C6-C98DA3205C09}" type="datetimeFigureOut">
               <a:rPr lang="en-US" smtClean="0"/>
               <a:pPr/>
-              <a:t>8/12/2026</a:t>
+              <a:t>8/17/2026</a:t>
             </a:fld>
             <a:endParaRPr lang="en-US"/>
           </a:p>
@@ -4523,7 +4789,7 @@
             <a:fld id="{1D8BD707-D9CF-40AE-B4C6-C98DA3205C09}" type="datetimeFigureOut">
               <a:rPr lang="en-US" smtClean="0"/>
               <a:pPr/>
-              <a:t>8/12/2026</a:t>
+              <a:t>8/17/2026</a:t>
             </a:fld>
             <a:endParaRPr lang="en-US"/>
           </a:p>
@@ -4637,7 +4903,7 @@
             <a:fld id="{1D8BD707-D9CF-40AE-B4C6-C98DA3205C09}" type="datetimeFigureOut">
               <a:rPr lang="en-US" smtClean="0"/>
               <a:pPr/>
-              <a:t>8/12/2026</a:t>
+              <a:t>8/17/2026</a:t>
             </a:fld>
             <a:endParaRPr lang="en-US"/>
           </a:p>
@@ -4729,7 +4995,7 @@
             <a:fld id="{1D8BD707-D9CF-40AE-B4C6-C98DA3205C09}" type="datetimeFigureOut">
               <a:rPr lang="en-US" smtClean="0"/>
               <a:pPr/>
-              <a:t>8/12/2026</a:t>
+              <a:t>8/17/2026</a:t>
             </a:fld>
             <a:endParaRPr lang="en-US"/>
           </a:p>
@@ -5001,7 +5267,7 @@
             <a:fld id="{1D8BD707-D9CF-40AE-B4C6-C98DA3205C09}" type="datetimeFigureOut">
               <a:rPr lang="en-US" smtClean="0"/>
               <a:pPr/>
-              <a:t>8/12/2026</a:t>
+              <a:t>8/17/2026</a:t>
             </a:fld>
             <a:endParaRPr lang="en-US"/>
           </a:p>
@@ -5250,7 +5516,7 @@
             <a:fld id="{1D8BD707-D9CF-40AE-B4C6-C98DA3205C09}" type="datetimeFigureOut">
               <a:rPr lang="en-US" smtClean="0"/>
               <a:pPr/>
-              <a:t>8/12/2026</a:t>
+              <a:t>8/17/2026</a:t>
             </a:fld>
             <a:endParaRPr lang="en-US"/>
           </a:p>
@@ -5458,7 +5724,7 @@
             <a:fld id="{1D8BD707-D9CF-40AE-B4C6-C98DA3205C09}" type="datetimeFigureOut">
               <a:rPr lang="en-US" smtClean="0"/>
               <a:pPr/>
-              <a:t>8/12/2026</a:t>
+              <a:t>8/17/2026</a:t>
             </a:fld>
             <a:endParaRPr lang="en-US"/>
           </a:p>
@@ -6180,6 +6446,852 @@
     </p:bg>
     <p:spTree>
       <p:nvGrpSpPr>
+        <p:cNvPr id="1" name="">
+          <a:extLst>
+            <a:ext uri="{FF2B5EF4-FFF2-40B4-BE49-F238E27FC236}">
+              <a16:creationId xmlns:a16="http://schemas.microsoft.com/office/drawing/2014/main" id="{88524717-E84E-EA39-9CD9-087D06E612A2}"/>
+            </a:ext>
+          </a:extLst>
+        </p:cNvPr>
+        <p:cNvGrpSpPr/>
+        <p:nvPr/>
+      </p:nvGrpSpPr>
+      <p:grpSpPr>
+        <a:xfrm>
+          <a:off x="0" y="0"/>
+          <a:ext cx="0" cy="0"/>
+          <a:chOff x="0" y="0"/>
+          <a:chExt cx="0" cy="0"/>
+        </a:xfrm>
+      </p:grpSpPr>
+      <p:grpSp>
+        <p:nvGrpSpPr>
+          <p:cNvPr id="2" name="Group 2">
+            <a:extLst>
+              <a:ext uri="{FF2B5EF4-FFF2-40B4-BE49-F238E27FC236}">
+                <a16:creationId xmlns:a16="http://schemas.microsoft.com/office/drawing/2014/main" id="{FFF7FA04-D3D3-29B1-4145-DAFD038C2A27}"/>
+              </a:ext>
+            </a:extLst>
+          </p:cNvPr>
+          <p:cNvGrpSpPr/>
+          <p:nvPr/>
+        </p:nvGrpSpPr>
+        <p:grpSpPr>
+          <a:xfrm>
+            <a:off x="0" y="0"/>
+            <a:ext cx="18301840" cy="10295039"/>
+            <a:chOff x="0" y="0"/>
+            <a:chExt cx="24402453" cy="13726719"/>
+          </a:xfrm>
+        </p:grpSpPr>
+        <p:sp>
+          <p:nvSpPr>
+            <p:cNvPr id="3" name="Freeform 3">
+              <a:extLst>
+                <a:ext uri="{FF2B5EF4-FFF2-40B4-BE49-F238E27FC236}">
+                  <a16:creationId xmlns:a16="http://schemas.microsoft.com/office/drawing/2014/main" id="{F443C58E-5A8C-8F0D-3D56-2E00F2800D9B}"/>
+                </a:ext>
+              </a:extLst>
+            </p:cNvPr>
+            <p:cNvSpPr/>
+            <p:nvPr/>
+          </p:nvSpPr>
+          <p:spPr>
+            <a:xfrm>
+              <a:off x="0" y="0"/>
+              <a:ext cx="24402414" cy="13726668"/>
+            </a:xfrm>
+            <a:custGeom>
+              <a:avLst/>
+              <a:gdLst/>
+              <a:ahLst/>
+              <a:cxnLst/>
+              <a:rect l="l" t="t" r="r" b="b"/>
+              <a:pathLst>
+                <a:path w="24402414" h="13726668">
+                  <a:moveTo>
+                    <a:pt x="0" y="0"/>
+                  </a:moveTo>
+                  <a:lnTo>
+                    <a:pt x="24402414" y="0"/>
+                  </a:lnTo>
+                  <a:lnTo>
+                    <a:pt x="24402414" y="13726668"/>
+                  </a:lnTo>
+                  <a:lnTo>
+                    <a:pt x="0" y="13726668"/>
+                  </a:lnTo>
+                  <a:close/>
+                </a:path>
+              </a:pathLst>
+            </a:custGeom>
+            <a:solidFill>
+              <a:srgbClr val="F0F0F1"/>
+            </a:solidFill>
+          </p:spPr>
+          <p:txBody>
+            <a:bodyPr/>
+            <a:lstStyle/>
+            <a:p>
+              <a:endParaRPr lang="en-IN"/>
+            </a:p>
+          </p:txBody>
+        </p:sp>
+      </p:grpSp>
+      <p:grpSp>
+        <p:nvGrpSpPr>
+          <p:cNvPr id="4" name="Group 4">
+            <a:extLst>
+              <a:ext uri="{FF2B5EF4-FFF2-40B4-BE49-F238E27FC236}">
+                <a16:creationId xmlns:a16="http://schemas.microsoft.com/office/drawing/2014/main" id="{4F5D0245-FE42-8DB5-08B4-A9A2AB321190}"/>
+              </a:ext>
+            </a:extLst>
+          </p:cNvPr>
+          <p:cNvGrpSpPr/>
+          <p:nvPr/>
+        </p:nvGrpSpPr>
+        <p:grpSpPr>
+          <a:xfrm>
+            <a:off x="0" y="0"/>
+            <a:ext cx="18301840" cy="10295039"/>
+            <a:chOff x="0" y="0"/>
+            <a:chExt cx="24402453" cy="13726719"/>
+          </a:xfrm>
+        </p:grpSpPr>
+        <p:sp>
+          <p:nvSpPr>
+            <p:cNvPr id="5" name="Freeform 5">
+              <a:extLst>
+                <a:ext uri="{FF2B5EF4-FFF2-40B4-BE49-F238E27FC236}">
+                  <a16:creationId xmlns:a16="http://schemas.microsoft.com/office/drawing/2014/main" id="{DC55446B-4A00-FB57-7049-343604F7E0E8}"/>
+                </a:ext>
+              </a:extLst>
+            </p:cNvPr>
+            <p:cNvSpPr/>
+            <p:nvPr/>
+          </p:nvSpPr>
+          <p:spPr>
+            <a:xfrm>
+              <a:off x="0" y="0"/>
+              <a:ext cx="24402414" cy="13726668"/>
+            </a:xfrm>
+            <a:custGeom>
+              <a:avLst/>
+              <a:gdLst/>
+              <a:ahLst/>
+              <a:cxnLst/>
+              <a:rect l="l" t="t" r="r" b="b"/>
+              <a:pathLst>
+                <a:path w="24402414" h="13726668">
+                  <a:moveTo>
+                    <a:pt x="0" y="0"/>
+                  </a:moveTo>
+                  <a:lnTo>
+                    <a:pt x="24402414" y="0"/>
+                  </a:lnTo>
+                  <a:lnTo>
+                    <a:pt x="24402414" y="13726668"/>
+                  </a:lnTo>
+                  <a:lnTo>
+                    <a:pt x="0" y="13726668"/>
+                  </a:lnTo>
+                  <a:close/>
+                </a:path>
+              </a:pathLst>
+            </a:custGeom>
+            <a:solidFill>
+              <a:srgbClr val="FFFFFF"/>
+            </a:solidFill>
+          </p:spPr>
+          <p:txBody>
+            <a:bodyPr/>
+            <a:lstStyle/>
+            <a:p>
+              <a:endParaRPr lang="en-IN" dirty="0"/>
+            </a:p>
+          </p:txBody>
+        </p:sp>
+      </p:grpSp>
+      <p:grpSp>
+        <p:nvGrpSpPr>
+          <p:cNvPr id="6" name="Group 6">
+            <a:extLst>
+              <a:ext uri="{FF2B5EF4-FFF2-40B4-BE49-F238E27FC236}">
+                <a16:creationId xmlns:a16="http://schemas.microsoft.com/office/drawing/2014/main" id="{D480C064-8814-10F0-BF7A-26D1D4F40FFA}"/>
+              </a:ext>
+            </a:extLst>
+          </p:cNvPr>
+          <p:cNvGrpSpPr/>
+          <p:nvPr/>
+        </p:nvGrpSpPr>
+        <p:grpSpPr>
+          <a:xfrm>
+            <a:off x="992991" y="2798074"/>
+            <a:ext cx="1281484" cy="344805"/>
+            <a:chOff x="0" y="0"/>
+            <a:chExt cx="1708645" cy="459740"/>
+          </a:xfrm>
+        </p:grpSpPr>
+        <p:sp>
+          <p:nvSpPr>
+            <p:cNvPr id="7" name="Freeform 7">
+              <a:extLst>
+                <a:ext uri="{FF2B5EF4-FFF2-40B4-BE49-F238E27FC236}">
+                  <a16:creationId xmlns:a16="http://schemas.microsoft.com/office/drawing/2014/main" id="{BE220B74-913C-EE5A-D4AA-61443109F6E3}"/>
+                </a:ext>
+              </a:extLst>
+            </p:cNvPr>
+            <p:cNvSpPr/>
+            <p:nvPr/>
+          </p:nvSpPr>
+          <p:spPr>
+            <a:xfrm>
+              <a:off x="0" y="0"/>
+              <a:ext cx="1708658" cy="459740"/>
+            </a:xfrm>
+            <a:custGeom>
+              <a:avLst/>
+              <a:gdLst/>
+              <a:ahLst/>
+              <a:cxnLst/>
+              <a:rect l="l" t="t" r="r" b="b"/>
+              <a:pathLst>
+                <a:path w="1708658" h="459740">
+                  <a:moveTo>
+                    <a:pt x="0" y="36322"/>
+                  </a:moveTo>
+                  <a:cubicBezTo>
+                    <a:pt x="0" y="16256"/>
+                    <a:pt x="16256" y="0"/>
+                    <a:pt x="36322" y="0"/>
+                  </a:cubicBezTo>
+                  <a:lnTo>
+                    <a:pt x="1672336" y="0"/>
+                  </a:lnTo>
+                  <a:cubicBezTo>
+                    <a:pt x="1692402" y="0"/>
+                    <a:pt x="1708658" y="16256"/>
+                    <a:pt x="1708658" y="36322"/>
+                  </a:cubicBezTo>
+                  <a:lnTo>
+                    <a:pt x="1708658" y="423418"/>
+                  </a:lnTo>
+                  <a:cubicBezTo>
+                    <a:pt x="1708658" y="443484"/>
+                    <a:pt x="1692402" y="459740"/>
+                    <a:pt x="1672336" y="459740"/>
+                  </a:cubicBezTo>
+                  <a:lnTo>
+                    <a:pt x="36322" y="459740"/>
+                  </a:lnTo>
+                  <a:cubicBezTo>
+                    <a:pt x="16256" y="459740"/>
+                    <a:pt x="0" y="443484"/>
+                    <a:pt x="0" y="423418"/>
+                  </a:cubicBezTo>
+                  <a:close/>
+                </a:path>
+              </a:pathLst>
+            </a:custGeom>
+            <a:solidFill>
+              <a:srgbClr val="CCD7FF"/>
+            </a:solidFill>
+          </p:spPr>
+          <p:txBody>
+            <a:bodyPr/>
+            <a:lstStyle/>
+            <a:p>
+              <a:endParaRPr lang="en-IN"/>
+            </a:p>
+          </p:txBody>
+        </p:sp>
+      </p:grpSp>
+      <p:sp>
+        <p:nvSpPr>
+          <p:cNvPr id="10" name="TextBox 10">
+            <a:extLst>
+              <a:ext uri="{FF2B5EF4-FFF2-40B4-BE49-F238E27FC236}">
+                <a16:creationId xmlns:a16="http://schemas.microsoft.com/office/drawing/2014/main" id="{71819304-83E1-6E43-E3B0-F08A1ACC2DD9}"/>
+              </a:ext>
+            </a:extLst>
+          </p:cNvPr>
+          <p:cNvSpPr txBox="1"/>
+          <p:nvPr/>
+        </p:nvSpPr>
+        <p:spPr>
+          <a:xfrm>
+            <a:off x="992991" y="1574225"/>
+            <a:ext cx="6401753" cy="660758"/>
+          </a:xfrm>
+          <a:prstGeom prst="rect">
+            <a:avLst/>
+          </a:prstGeom>
+        </p:spPr>
+        <p:txBody>
+          <a:bodyPr lIns="0" tIns="0" rIns="0" bIns="0" rtlCol="0" anchor="t">
+            <a:spAutoFit/>
+          </a:bodyPr>
+          <a:lstStyle/>
+          <a:p>
+            <a:pPr algn="l">
+              <a:lnSpc>
+                <a:spcPts val="5526"/>
+              </a:lnSpc>
+            </a:pPr>
+            <a:r>
+              <a:rPr lang="en-US" sz="4428" dirty="0">
+                <a:solidFill>
+                  <a:srgbClr val="152D47"/>
+                </a:solidFill>
+                <a:latin typeface="Crimson Pro"/>
+                <a:ea typeface="Crimson Pro"/>
+                <a:cs typeface="Crimson Pro"/>
+                <a:sym typeface="Crimson Pro"/>
+              </a:rPr>
+              <a:t>Department Performance</a:t>
+            </a:r>
+          </a:p>
+        </p:txBody>
+      </p:sp>
+      <p:sp>
+        <p:nvSpPr>
+          <p:cNvPr id="11" name="TextBox 11">
+            <a:extLst>
+              <a:ext uri="{FF2B5EF4-FFF2-40B4-BE49-F238E27FC236}">
+                <a16:creationId xmlns:a16="http://schemas.microsoft.com/office/drawing/2014/main" id="{A33843F1-01D8-2B1E-18F3-5241DFB07181}"/>
+              </a:ext>
+            </a:extLst>
+          </p:cNvPr>
+          <p:cNvSpPr txBox="1"/>
+          <p:nvPr/>
+        </p:nvSpPr>
+        <p:spPr>
+          <a:xfrm>
+            <a:off x="1129122" y="2866139"/>
+            <a:ext cx="1924317" cy="208674"/>
+          </a:xfrm>
+          <a:prstGeom prst="rect">
+            <a:avLst/>
+          </a:prstGeom>
+        </p:spPr>
+        <p:txBody>
+          <a:bodyPr lIns="0" tIns="0" rIns="0" bIns="0" rtlCol="0" anchor="t">
+            <a:spAutoFit/>
+          </a:bodyPr>
+          <a:lstStyle/>
+          <a:p>
+            <a:pPr algn="l">
+              <a:lnSpc>
+                <a:spcPts val="1642"/>
+              </a:lnSpc>
+            </a:pPr>
+            <a:r>
+              <a:rPr lang="en-US" sz="1426" dirty="0">
+                <a:solidFill>
+                  <a:srgbClr val="4C4C4D"/>
+                </a:solidFill>
+                <a:latin typeface="Heebo"/>
+                <a:ea typeface="Heebo"/>
+                <a:cs typeface="Heebo"/>
+                <a:sym typeface="Heebo"/>
+              </a:rPr>
+              <a:t>PAGE 3 OF 3</a:t>
+            </a:r>
+          </a:p>
+        </p:txBody>
+      </p:sp>
+      <p:sp>
+        <p:nvSpPr>
+          <p:cNvPr id="12" name="TextBox 12">
+            <a:extLst>
+              <a:ext uri="{FF2B5EF4-FFF2-40B4-BE49-F238E27FC236}">
+                <a16:creationId xmlns:a16="http://schemas.microsoft.com/office/drawing/2014/main" id="{B6B49D95-F557-1678-FDF1-E2673428B504}"/>
+              </a:ext>
+            </a:extLst>
+          </p:cNvPr>
+          <p:cNvSpPr txBox="1"/>
+          <p:nvPr/>
+        </p:nvSpPr>
+        <p:spPr>
+          <a:xfrm>
+            <a:off x="992991" y="3186836"/>
+            <a:ext cx="7037451" cy="324384"/>
+          </a:xfrm>
+          <a:prstGeom prst="rect">
+            <a:avLst/>
+          </a:prstGeom>
+        </p:spPr>
+        <p:txBody>
+          <a:bodyPr lIns="0" tIns="0" rIns="0" bIns="0" rtlCol="0" anchor="t">
+            <a:spAutoFit/>
+          </a:bodyPr>
+          <a:lstStyle/>
+          <a:p>
+            <a:pPr algn="l">
+              <a:lnSpc>
+                <a:spcPts val="2716"/>
+              </a:lnSpc>
+            </a:pPr>
+            <a:r>
+              <a:rPr lang="en-US" sz="2176" dirty="0">
+                <a:solidFill>
+                  <a:srgbClr val="152D47"/>
+                </a:solidFill>
+                <a:latin typeface="Crimson Pro"/>
+                <a:ea typeface="Crimson Pro"/>
+                <a:cs typeface="Crimson Pro"/>
+                <a:sym typeface="Crimson Pro"/>
+              </a:rPr>
+              <a:t>Department Summary Table</a:t>
+            </a:r>
+          </a:p>
+        </p:txBody>
+      </p:sp>
+      <p:sp>
+        <p:nvSpPr>
+          <p:cNvPr id="13" name="TextBox 13">
+            <a:extLst>
+              <a:ext uri="{FF2B5EF4-FFF2-40B4-BE49-F238E27FC236}">
+                <a16:creationId xmlns:a16="http://schemas.microsoft.com/office/drawing/2014/main" id="{9A5299E4-8AC1-5125-B214-61F0FDE39E86}"/>
+              </a:ext>
+            </a:extLst>
+          </p:cNvPr>
+          <p:cNvSpPr txBox="1"/>
+          <p:nvPr/>
+        </p:nvSpPr>
+        <p:spPr>
+          <a:xfrm>
+            <a:off x="992991" y="3723037"/>
+            <a:ext cx="7037451" cy="306879"/>
+          </a:xfrm>
+          <a:prstGeom prst="rect">
+            <a:avLst/>
+          </a:prstGeom>
+        </p:spPr>
+        <p:txBody>
+          <a:bodyPr lIns="0" tIns="0" rIns="0" bIns="0" rtlCol="0" anchor="t">
+            <a:spAutoFit/>
+          </a:bodyPr>
+          <a:lstStyle/>
+          <a:p>
+            <a:pPr algn="l">
+              <a:lnSpc>
+                <a:spcPts val="2485"/>
+              </a:lnSpc>
+            </a:pPr>
+            <a:r>
+              <a:rPr lang="en-US" sz="1726" dirty="0">
+                <a:solidFill>
+                  <a:srgbClr val="4C4C4D"/>
+                </a:solidFill>
+                <a:latin typeface="Heebo"/>
+                <a:ea typeface="Heebo"/>
+                <a:cs typeface="Heebo"/>
+                <a:sym typeface="Heebo"/>
+              </a:rPr>
+              <a:t>Working years, tenure, income</a:t>
+            </a:r>
+          </a:p>
+        </p:txBody>
+      </p:sp>
+      <p:sp>
+        <p:nvSpPr>
+          <p:cNvPr id="14" name="TextBox 14">
+            <a:extLst>
+              <a:ext uri="{FF2B5EF4-FFF2-40B4-BE49-F238E27FC236}">
+                <a16:creationId xmlns:a16="http://schemas.microsoft.com/office/drawing/2014/main" id="{C44F8FA9-F525-7945-18CB-AEFCF9FEA379}"/>
+              </a:ext>
+            </a:extLst>
+          </p:cNvPr>
+          <p:cNvSpPr txBox="1"/>
+          <p:nvPr/>
+        </p:nvSpPr>
+        <p:spPr>
+          <a:xfrm>
+            <a:off x="992991" y="4204213"/>
+            <a:ext cx="7037451" cy="324384"/>
+          </a:xfrm>
+          <a:prstGeom prst="rect">
+            <a:avLst/>
+          </a:prstGeom>
+        </p:spPr>
+        <p:txBody>
+          <a:bodyPr lIns="0" tIns="0" rIns="0" bIns="0" rtlCol="0" anchor="t">
+            <a:spAutoFit/>
+          </a:bodyPr>
+          <a:lstStyle/>
+          <a:p>
+            <a:pPr algn="l">
+              <a:lnSpc>
+                <a:spcPts val="2716"/>
+              </a:lnSpc>
+            </a:pPr>
+            <a:r>
+              <a:rPr lang="en-US" sz="2176" dirty="0">
+                <a:solidFill>
+                  <a:srgbClr val="152D47"/>
+                </a:solidFill>
+                <a:latin typeface="Crimson Pro"/>
+                <a:ea typeface="Crimson Pro"/>
+                <a:cs typeface="Crimson Pro"/>
+                <a:sym typeface="Crimson Pro"/>
+              </a:rPr>
+              <a:t>Employee Job Role</a:t>
+            </a:r>
+          </a:p>
+        </p:txBody>
+      </p:sp>
+      <p:sp>
+        <p:nvSpPr>
+          <p:cNvPr id="15" name="TextBox 15">
+            <a:extLst>
+              <a:ext uri="{FF2B5EF4-FFF2-40B4-BE49-F238E27FC236}">
+                <a16:creationId xmlns:a16="http://schemas.microsoft.com/office/drawing/2014/main" id="{DE802907-83C9-18C1-1C88-329D190FA9FA}"/>
+              </a:ext>
+            </a:extLst>
+          </p:cNvPr>
+          <p:cNvSpPr txBox="1"/>
+          <p:nvPr/>
+        </p:nvSpPr>
+        <p:spPr>
+          <a:xfrm>
+            <a:off x="992991" y="4740413"/>
+            <a:ext cx="7037451" cy="306879"/>
+          </a:xfrm>
+          <a:prstGeom prst="rect">
+            <a:avLst/>
+          </a:prstGeom>
+        </p:spPr>
+        <p:txBody>
+          <a:bodyPr lIns="0" tIns="0" rIns="0" bIns="0" rtlCol="0" anchor="t">
+            <a:spAutoFit/>
+          </a:bodyPr>
+          <a:lstStyle/>
+          <a:p>
+            <a:pPr algn="l">
+              <a:lnSpc>
+                <a:spcPts val="2485"/>
+              </a:lnSpc>
+            </a:pPr>
+            <a:r>
+              <a:rPr lang="en-US" sz="1726" dirty="0">
+                <a:solidFill>
+                  <a:srgbClr val="4C4C4D"/>
+                </a:solidFill>
+                <a:latin typeface="Heebo"/>
+                <a:ea typeface="Heebo"/>
+                <a:cs typeface="Heebo"/>
+                <a:sym typeface="Heebo"/>
+              </a:rPr>
+              <a:t>Employees Left by Job Role and Average Salary by Job Role</a:t>
+            </a:r>
+          </a:p>
+        </p:txBody>
+      </p:sp>
+      <p:sp>
+        <p:nvSpPr>
+          <p:cNvPr id="16" name="TextBox 16">
+            <a:extLst>
+              <a:ext uri="{FF2B5EF4-FFF2-40B4-BE49-F238E27FC236}">
+                <a16:creationId xmlns:a16="http://schemas.microsoft.com/office/drawing/2014/main" id="{8193DD98-89FC-C7B4-9B2E-EB8E5B204523}"/>
+              </a:ext>
+            </a:extLst>
+          </p:cNvPr>
+          <p:cNvSpPr txBox="1"/>
+          <p:nvPr/>
+        </p:nvSpPr>
+        <p:spPr>
+          <a:xfrm>
+            <a:off x="992991" y="5219700"/>
+            <a:ext cx="7037451" cy="392504"/>
+          </a:xfrm>
+          <a:prstGeom prst="rect">
+            <a:avLst/>
+          </a:prstGeom>
+        </p:spPr>
+        <p:txBody>
+          <a:bodyPr lIns="0" tIns="0" rIns="0" bIns="0" rtlCol="0" anchor="t">
+            <a:spAutoFit/>
+          </a:bodyPr>
+          <a:lstStyle/>
+          <a:p>
+            <a:pPr algn="l">
+              <a:lnSpc>
+                <a:spcPts val="2716"/>
+              </a:lnSpc>
+            </a:pPr>
+            <a:r>
+              <a:rPr lang="en-US" sz="2176" dirty="0">
+                <a:solidFill>
+                  <a:srgbClr val="152D47"/>
+                </a:solidFill>
+                <a:latin typeface="Crimson Pro"/>
+                <a:ea typeface="Crimson Pro"/>
+                <a:cs typeface="Crimson Pro"/>
+                <a:sym typeface="Crimson Pro"/>
+              </a:rPr>
+              <a:t>Job Satisfaction breakdown</a:t>
+            </a:r>
+          </a:p>
+        </p:txBody>
+      </p:sp>
+      <p:sp>
+        <p:nvSpPr>
+          <p:cNvPr id="17" name="TextBox 17">
+            <a:extLst>
+              <a:ext uri="{FF2B5EF4-FFF2-40B4-BE49-F238E27FC236}">
+                <a16:creationId xmlns:a16="http://schemas.microsoft.com/office/drawing/2014/main" id="{6E4BF538-A678-A818-0603-08FE28241599}"/>
+              </a:ext>
+            </a:extLst>
+          </p:cNvPr>
+          <p:cNvSpPr txBox="1"/>
+          <p:nvPr/>
+        </p:nvSpPr>
+        <p:spPr>
+          <a:xfrm>
+            <a:off x="992991" y="5789960"/>
+            <a:ext cx="7037451" cy="948080"/>
+          </a:xfrm>
+          <a:prstGeom prst="rect">
+            <a:avLst/>
+          </a:prstGeom>
+        </p:spPr>
+        <p:txBody>
+          <a:bodyPr lIns="0" tIns="0" rIns="0" bIns="0" rtlCol="0" anchor="t">
+            <a:spAutoFit/>
+          </a:bodyPr>
+          <a:lstStyle/>
+          <a:p>
+            <a:pPr algn="l">
+              <a:lnSpc>
+                <a:spcPts val="2485"/>
+              </a:lnSpc>
+            </a:pPr>
+            <a:r>
+              <a:rPr lang="en-US" sz="1726" dirty="0">
+                <a:solidFill>
+                  <a:srgbClr val="4C4C4D"/>
+                </a:solidFill>
+                <a:latin typeface="Heebo"/>
+                <a:ea typeface="Heebo"/>
+                <a:cs typeface="Heebo"/>
+                <a:sym typeface="Heebo"/>
+              </a:rPr>
+              <a:t>Job satisfaction levels correlated with sum of years at company, sum of monthly income, and sum of total working years – and visualizing of all tenure bands.</a:t>
+            </a:r>
+          </a:p>
+        </p:txBody>
+      </p:sp>
+      <p:sp>
+        <p:nvSpPr>
+          <p:cNvPr id="18" name="TextBox 18">
+            <a:extLst>
+              <a:ext uri="{FF2B5EF4-FFF2-40B4-BE49-F238E27FC236}">
+                <a16:creationId xmlns:a16="http://schemas.microsoft.com/office/drawing/2014/main" id="{50D2B8E2-1FD8-EBB7-92AD-7043C96537EB}"/>
+              </a:ext>
+            </a:extLst>
+          </p:cNvPr>
+          <p:cNvSpPr txBox="1"/>
+          <p:nvPr/>
+        </p:nvSpPr>
+        <p:spPr>
+          <a:xfrm>
+            <a:off x="992991" y="6946879"/>
+            <a:ext cx="7037451" cy="383210"/>
+          </a:xfrm>
+          <a:prstGeom prst="rect">
+            <a:avLst/>
+          </a:prstGeom>
+        </p:spPr>
+        <p:txBody>
+          <a:bodyPr lIns="0" tIns="0" rIns="0" bIns="0" rtlCol="0" anchor="t">
+            <a:spAutoFit/>
+          </a:bodyPr>
+          <a:lstStyle/>
+          <a:p>
+            <a:pPr algn="l">
+              <a:lnSpc>
+                <a:spcPts val="2716"/>
+              </a:lnSpc>
+            </a:pPr>
+            <a:r>
+              <a:rPr lang="en-US" sz="2176" dirty="0">
+                <a:solidFill>
+                  <a:srgbClr val="152D47"/>
+                </a:solidFill>
+                <a:latin typeface="Crimson Pro"/>
+                <a:ea typeface="Crimson Pro"/>
+                <a:cs typeface="Crimson Pro"/>
+                <a:sym typeface="Crimson Pro"/>
+              </a:rPr>
+              <a:t>Drill-Through</a:t>
+            </a:r>
+          </a:p>
+        </p:txBody>
+      </p:sp>
+      <p:sp>
+        <p:nvSpPr>
+          <p:cNvPr id="19" name="TextBox 19">
+            <a:extLst>
+              <a:ext uri="{FF2B5EF4-FFF2-40B4-BE49-F238E27FC236}">
+                <a16:creationId xmlns:a16="http://schemas.microsoft.com/office/drawing/2014/main" id="{DED16B60-5900-683F-F443-F7D55E5B0816}"/>
+              </a:ext>
+            </a:extLst>
+          </p:cNvPr>
+          <p:cNvSpPr txBox="1"/>
+          <p:nvPr/>
+        </p:nvSpPr>
+        <p:spPr>
+          <a:xfrm>
+            <a:off x="992991" y="7483080"/>
+            <a:ext cx="7037451" cy="627479"/>
+          </a:xfrm>
+          <a:prstGeom prst="rect">
+            <a:avLst/>
+          </a:prstGeom>
+        </p:spPr>
+        <p:txBody>
+          <a:bodyPr lIns="0" tIns="0" rIns="0" bIns="0" rtlCol="0" anchor="t">
+            <a:spAutoFit/>
+          </a:bodyPr>
+          <a:lstStyle/>
+          <a:p>
+            <a:pPr algn="l">
+              <a:lnSpc>
+                <a:spcPts val="2485"/>
+              </a:lnSpc>
+            </a:pPr>
+            <a:r>
+              <a:rPr lang="en-US" sz="1726" dirty="0">
+                <a:solidFill>
+                  <a:srgbClr val="4C4C4D"/>
+                </a:solidFill>
+                <a:latin typeface="Heebo"/>
+                <a:ea typeface="Heebo"/>
+                <a:cs typeface="Heebo"/>
+                <a:sym typeface="Heebo"/>
+              </a:rPr>
+              <a:t>Click any department row to navigate to a </a:t>
+            </a:r>
+            <a:r>
+              <a:rPr lang="en-US" sz="1726" b="1" dirty="0">
+                <a:solidFill>
+                  <a:srgbClr val="4C4C4D"/>
+                </a:solidFill>
+                <a:latin typeface="Heebo Bold"/>
+                <a:ea typeface="Heebo Bold"/>
+                <a:cs typeface="Heebo Bold"/>
+                <a:sym typeface="Heebo Bold"/>
+              </a:rPr>
+              <a:t>detailed individual profile page</a:t>
+            </a:r>
+            <a:r>
+              <a:rPr lang="en-US" sz="1726" dirty="0">
+                <a:solidFill>
+                  <a:srgbClr val="4C4C4D"/>
+                </a:solidFill>
+                <a:latin typeface="Heebo"/>
+                <a:ea typeface="Heebo"/>
+                <a:cs typeface="Heebo"/>
+                <a:sym typeface="Heebo"/>
+              </a:rPr>
+              <a:t> with full HR history.</a:t>
+            </a:r>
+          </a:p>
+        </p:txBody>
+      </p:sp>
+      <p:pic>
+        <p:nvPicPr>
+          <p:cNvPr id="21" name="Picture 20">
+            <a:extLst>
+              <a:ext uri="{FF2B5EF4-FFF2-40B4-BE49-F238E27FC236}">
+                <a16:creationId xmlns:a16="http://schemas.microsoft.com/office/drawing/2014/main" id="{66631F2F-DBB1-AC78-3F72-FDAEA12575EA}"/>
+              </a:ext>
+            </a:extLst>
+          </p:cNvPr>
+          <p:cNvPicPr>
+            <a:picLocks noChangeAspect="1"/>
+          </p:cNvPicPr>
+          <p:nvPr/>
+        </p:nvPicPr>
+        <p:blipFill>
+          <a:blip r:embed="rId3">
+            <a:extLst>
+              <a:ext uri="{28A0092B-C50C-407E-A947-70E740481C1C}">
+                <a14:useLocalDpi xmlns:a14="http://schemas.microsoft.com/office/drawing/2010/main" val="0"/>
+              </a:ext>
+            </a:extLst>
+          </a:blip>
+          <a:stretch>
+            <a:fillRect/>
+          </a:stretch>
+        </p:blipFill>
+        <p:spPr>
+          <a:xfrm>
+            <a:off x="14859000" y="342900"/>
+            <a:ext cx="3113695" cy="910157"/>
+          </a:xfrm>
+          <a:prstGeom prst="rect">
+            <a:avLst/>
+          </a:prstGeom>
+        </p:spPr>
+      </p:pic>
+      <p:pic>
+        <p:nvPicPr>
+          <p:cNvPr id="9" name="Picture 8">
+            <a:extLst>
+              <a:ext uri="{FF2B5EF4-FFF2-40B4-BE49-F238E27FC236}">
+                <a16:creationId xmlns:a16="http://schemas.microsoft.com/office/drawing/2014/main" id="{C3AEF649-82F8-2E1F-4F5D-1E6B8CFA58A8}"/>
+              </a:ext>
+            </a:extLst>
+          </p:cNvPr>
+          <p:cNvPicPr>
+            <a:picLocks noChangeAspect="1"/>
+          </p:cNvPicPr>
+          <p:nvPr/>
+        </p:nvPicPr>
+        <p:blipFill>
+          <a:blip r:embed="rId4"/>
+          <a:stretch>
+            <a:fillRect/>
+          </a:stretch>
+        </p:blipFill>
+        <p:spPr>
+          <a:xfrm>
+            <a:off x="8644224" y="2592104"/>
+            <a:ext cx="9112630" cy="5091942"/>
+          </a:xfrm>
+          <a:prstGeom prst="rect">
+            <a:avLst/>
+          </a:prstGeom>
+        </p:spPr>
+      </p:pic>
+    </p:spTree>
+    <p:extLst>
+      <p:ext uri="{BB962C8B-B14F-4D97-AF65-F5344CB8AC3E}">
+        <p14:creationId xmlns:p14="http://schemas.microsoft.com/office/powerpoint/2010/main" val="691222814"/>
+      </p:ext>
+    </p:extLst>
+  </p:cSld>
+  <p:clrMapOvr>
+    <a:masterClrMapping/>
+  </p:clrMapOvr>
+</p:sld>
+</file>
+
+<file path=ppt/slides/slide11.xml><?xml version="1.0" encoding="utf-8"?>
+<p:sld xmlns:a="http://schemas.openxmlformats.org/drawingml/2006/main" xmlns:r="http://schemas.openxmlformats.org/officeDocument/2006/relationships" xmlns:p="http://schemas.openxmlformats.org/presentationml/2006/main">
+  <p:cSld>
+    <p:bg>
+      <p:bgPr>
+        <a:solidFill>
+          <a:srgbClr val="000000"/>
+        </a:solidFill>
+        <a:effectLst/>
+      </p:bgPr>
+    </p:bg>
+    <p:spTree>
+      <p:nvGrpSpPr>
         <p:cNvPr id="1" name=""/>
         <p:cNvGrpSpPr/>
         <p:nvPr/>
@@ -6961,7 +8073,7 @@
 </p:sld>
 </file>
 
-<file path=ppt/slides/slide11.xml><?xml version="1.0" encoding="utf-8"?>
+<file path=ppt/slides/slide12.xml><?xml version="1.0" encoding="utf-8"?>
 <p:sld xmlns:a="http://schemas.openxmlformats.org/drawingml/2006/main" xmlns:r="http://schemas.openxmlformats.org/officeDocument/2006/relationships" xmlns:p="http://schemas.openxmlformats.org/presentationml/2006/main">
   <p:cSld>
     <p:bg>

--- a/HR-Employee-Analytics-Dashboard.pptx
+++ b/HR-Employee-Analytics-Dashboard.pptx
@@ -31,10 +31,11 @@
     <p:embeddedFont>
       <p:font typeface="Heebo" pitchFamily="2" charset="-79"/>
       <p:regular r:id="rId16"/>
+      <p:bold r:id="rId17"/>
     </p:embeddedFont>
     <p:embeddedFont>
-      <p:font typeface="Heebo Bold" panose="020B0604020202020204" charset="-79"/>
-      <p:regular r:id="rId17"/>
+      <p:font typeface="Heebo Bold" charset="-79"/>
+      <p:regular r:id="rId18"/>
     </p:embeddedFont>
   </p:embeddedFontLst>
   <p:defaultTextStyle>
@@ -6375,7 +6376,7 @@
               </a:lnSpc>
             </a:pPr>
             <a:r>
-              <a:rPr lang="en-US" sz="2176">
+              <a:rPr lang="en-US" sz="2176" dirty="0">
                 <a:solidFill>
                   <a:srgbClr val="4C4C4D"/>
                 </a:solidFill>
@@ -6425,6 +6426,53 @@
           </a:prstGeom>
         </p:spPr>
       </p:pic>
+      <p:sp>
+        <p:nvSpPr>
+          <p:cNvPr id="9" name="TextBox 11">
+            <a:extLst>
+              <a:ext uri="{FF2B5EF4-FFF2-40B4-BE49-F238E27FC236}">
+                <a16:creationId xmlns:a16="http://schemas.microsoft.com/office/drawing/2014/main" id="{93451DB5-93F8-BFD4-3542-B1B44940F751}"/>
+              </a:ext>
+            </a:extLst>
+          </p:cNvPr>
+          <p:cNvSpPr txBox="1"/>
+          <p:nvPr/>
+        </p:nvSpPr>
+        <p:spPr>
+          <a:xfrm>
+            <a:off x="7848600" y="6365919"/>
+            <a:ext cx="8534400" cy="420371"/>
+          </a:xfrm>
+          <a:prstGeom prst="rect">
+            <a:avLst/>
+          </a:prstGeom>
+        </p:spPr>
+        <p:txBody>
+          <a:bodyPr wrap="square" lIns="0" tIns="0" rIns="0" bIns="0" rtlCol="0" anchor="t">
+            <a:spAutoFit/>
+          </a:bodyPr>
+          <a:lstStyle/>
+          <a:p>
+            <a:pPr algn="l">
+              <a:lnSpc>
+                <a:spcPts val="3474"/>
+              </a:lnSpc>
+            </a:pPr>
+            <a:r>
+              <a:rPr lang="en-US" sz="2176" dirty="0">
+                <a:solidFill>
+                  <a:srgbClr val="4C4C4D"/>
+                </a:solidFill>
+                <a:latin typeface="Heebo"/>
+                <a:ea typeface="Heebo"/>
+                <a:cs typeface="Heebo"/>
+                <a:sym typeface="Heebo"/>
+              </a:rPr>
+              <a:t>Presented By: Rudrashis Chowdhury, Gourab Mondal and Tuhin Roy</a:t>
+            </a:r>
+          </a:p>
+        </p:txBody>
+      </p:sp>
     </p:spTree>
   </p:cSld>
   <p:clrMapOvr>

--- a/HR-Employee-Analytics-Dashboard.pptx
+++ b/HR-Employee-Analytics-Dashboard.pptx
@@ -7243,7 +7243,31 @@
                 <a:cs typeface="Heebo"/>
                 <a:sym typeface="Heebo"/>
               </a:rPr>
-              <a:t> with full HR history.</a:t>
+              <a:t> with </a:t>
+            </a:r>
+            <a:r>
+              <a:rPr lang="en-US" sz="1726" dirty="0" err="1">
+                <a:solidFill>
+                  <a:srgbClr val="4C4C4D"/>
+                </a:solidFill>
+                <a:latin typeface="Heebo"/>
+                <a:ea typeface="Heebo"/>
+                <a:cs typeface="Heebo"/>
+                <a:sym typeface="Heebo"/>
+              </a:rPr>
+              <a:t>JobRole</a:t>
+            </a:r>
+            <a:r>
+              <a:rPr lang="en-US" sz="1726" dirty="0">
+                <a:solidFill>
+                  <a:srgbClr val="4C4C4D"/>
+                </a:solidFill>
+                <a:latin typeface="Heebo"/>
+                <a:ea typeface="Heebo"/>
+                <a:cs typeface="Heebo"/>
+                <a:sym typeface="Heebo"/>
+              </a:rPr>
+              <a:t>.</a:t>
             </a:r>
           </a:p>
         </p:txBody>
@@ -8279,7 +8303,7 @@
         <p:spPr>
           <a:xfrm>
             <a:off x="992991" y="1381039"/>
-            <a:ext cx="16315868" cy="693610"/>
+            <a:ext cx="16315868" cy="622991"/>
           </a:xfrm>
           <a:prstGeom prst="rect">
             <a:avLst/>
@@ -8297,7 +8321,7 @@
               </a:lnSpc>
             </a:pPr>
             <a:r>
-              <a:rPr lang="en-US" sz="4128">
+              <a:rPr lang="en-US" sz="4128" dirty="0">
                 <a:solidFill>
                   <a:srgbClr val="152D47"/>
                 </a:solidFill>
@@ -8306,7 +8330,7 @@
                 <a:cs typeface="Crimson Pro"/>
                 <a:sym typeface="Crimson Pro"/>
               </a:rPr>
-              <a:t>Strategic Recommendations &amp; Future Scope</a:t>
+              <a:t>Strategic Recommendations</a:t>
             </a:r>
           </a:p>
         </p:txBody>
@@ -8854,8 +8878,8 @@
         </p:nvSpPr>
         <p:spPr>
           <a:xfrm>
-            <a:off x="992991" y="5896270"/>
-            <a:ext cx="3869331" cy="2453411"/>
+            <a:off x="9120309" y="2985440"/>
+            <a:ext cx="3869331" cy="2751306"/>
           </a:xfrm>
           <a:custGeom>
             <a:avLst/>
@@ -8913,7 +8937,7 @@
         </p:nvGrpSpPr>
         <p:grpSpPr>
           <a:xfrm>
-            <a:off x="2768060" y="6044460"/>
+            <a:off x="10895378" y="3119374"/>
             <a:ext cx="319183" cy="399021"/>
             <a:chOff x="0" y="0"/>
             <a:chExt cx="425577" cy="532028"/>
@@ -8996,7 +9020,7 @@
                 </a:lnSpc>
               </a:pPr>
               <a:r>
-                <a:rPr lang="en-US" sz="2476">
+                <a:rPr lang="en-US" sz="2476" dirty="0">
                   <a:solidFill>
                     <a:srgbClr val="4C4C4D"/>
                   </a:solidFill>
@@ -9019,7 +9043,7 @@
         </p:nvSpPr>
         <p:spPr>
           <a:xfrm>
-            <a:off x="1234269" y="6703705"/>
+            <a:off x="9361587" y="3792875"/>
             <a:ext cx="3386766" cy="351492"/>
           </a:xfrm>
           <a:prstGeom prst="rect">
@@ -9038,7 +9062,7 @@
               </a:lnSpc>
             </a:pPr>
             <a:r>
-              <a:rPr lang="en-US" sz="2026">
+              <a:rPr lang="en-US" sz="2026" dirty="0">
                 <a:solidFill>
                   <a:srgbClr val="4C4C4D"/>
                 </a:solidFill>
@@ -9060,7 +9084,7 @@
         </p:nvSpPr>
         <p:spPr>
           <a:xfrm>
-            <a:off x="1234269" y="7176621"/>
+            <a:off x="9361587" y="4265791"/>
             <a:ext cx="3386766" cy="931764"/>
           </a:xfrm>
           <a:prstGeom prst="rect">
@@ -9079,7 +9103,7 @@
               </a:lnSpc>
             </a:pPr>
             <a:r>
-              <a:rPr lang="en-US" sz="1651">
+              <a:rPr lang="en-US" sz="1651" dirty="0">
                 <a:solidFill>
                   <a:srgbClr val="4C4C4D"/>
                 </a:solidFill>
@@ -9101,8 +9125,8 @@
         </p:nvSpPr>
         <p:spPr>
           <a:xfrm>
-            <a:off x="5021837" y="5896270"/>
-            <a:ext cx="3869484" cy="2453411"/>
+            <a:off x="13385125" y="2985440"/>
+            <a:ext cx="3869484" cy="2751306"/>
           </a:xfrm>
           <a:custGeom>
             <a:avLst/>
@@ -9160,7 +9184,7 @@
         </p:nvGrpSpPr>
         <p:grpSpPr>
           <a:xfrm>
-            <a:off x="6796907" y="6044460"/>
+            <a:off x="15160195" y="3133630"/>
             <a:ext cx="319183" cy="399021"/>
             <a:chOff x="0" y="0"/>
             <a:chExt cx="425577" cy="532028"/>
@@ -9243,7 +9267,7 @@
                 </a:lnSpc>
               </a:pPr>
               <a:r>
-                <a:rPr lang="en-US" sz="2476">
+                <a:rPr lang="en-US" sz="2476" dirty="0">
                   <a:solidFill>
                     <a:srgbClr val="4C4C4D"/>
                   </a:solidFill>
@@ -9266,7 +9290,7 @@
         </p:nvSpPr>
         <p:spPr>
           <a:xfrm>
-            <a:off x="5263115" y="6703705"/>
+            <a:off x="13626403" y="3792875"/>
             <a:ext cx="3386909" cy="351492"/>
           </a:xfrm>
           <a:prstGeom prst="rect">
@@ -9307,7 +9331,7 @@
         </p:nvSpPr>
         <p:spPr>
           <a:xfrm>
-            <a:off x="5263115" y="7176621"/>
+            <a:off x="13626403" y="4265791"/>
             <a:ext cx="3386909" cy="931764"/>
           </a:xfrm>
           <a:prstGeom prst="rect">
@@ -9326,7 +9350,7 @@
               </a:lnSpc>
             </a:pPr>
             <a:r>
-              <a:rPr lang="en-US" sz="1651">
+              <a:rPr lang="en-US" sz="1651" dirty="0">
                 <a:solidFill>
                   <a:srgbClr val="4C4C4D"/>
                 </a:solidFill>
@@ -9337,65 +9361,6 @@
               </a:rPr>
               <a:t>Align salary bands with market data to close pay gaps identified in the dashboard</a:t>
             </a:r>
-          </a:p>
-        </p:txBody>
-      </p:sp>
-      <p:sp>
-        <p:nvSpPr>
-          <p:cNvPr id="51" name="Freeform 51" descr="preencoded.png"/>
-          <p:cNvSpPr/>
-          <p:nvPr/>
-        </p:nvSpPr>
-        <p:spPr>
-          <a:xfrm>
-            <a:off x="10217934" y="7065035"/>
-            <a:ext cx="319183" cy="319192"/>
-          </a:xfrm>
-          <a:custGeom>
-            <a:avLst/>
-            <a:gdLst/>
-            <a:ahLst/>
-            <a:cxnLst/>
-            <a:rect l="l" t="t" r="r" b="b"/>
-            <a:pathLst>
-              <a:path w="319183" h="319192">
-                <a:moveTo>
-                  <a:pt x="0" y="0"/>
-                </a:moveTo>
-                <a:lnTo>
-                  <a:pt x="319183" y="0"/>
-                </a:lnTo>
-                <a:lnTo>
-                  <a:pt x="319183" y="319193"/>
-                </a:lnTo>
-                <a:lnTo>
-                  <a:pt x="0" y="319193"/>
-                </a:lnTo>
-                <a:lnTo>
-                  <a:pt x="0" y="0"/>
-                </a:lnTo>
-                <a:close/>
-              </a:path>
-            </a:pathLst>
-          </a:custGeom>
-          <a:blipFill>
-            <a:blip>
-              <a:extLst>
-                <a:ext uri="{96DAC541-7B7A-43D3-8B79-37D633B846F1}">
-                  <asvg:svgBlip xmlns:asvg="http://schemas.microsoft.com/office/drawing/2016/SVG/main" r:embed="rId6"/>
-                </a:ext>
-              </a:extLst>
-            </a:blip>
-            <a:stretch>
-              <a:fillRect t="-26468" b="-26465"/>
-            </a:stretch>
-          </a:blipFill>
-        </p:spPr>
-        <p:txBody>
-          <a:bodyPr/>
-          <a:lstStyle/>
-          <a:p>
-            <a:endParaRPr lang="en-IN"/>
           </a:p>
         </p:txBody>
       </p:sp>
@@ -9414,7 +9379,7 @@
           <p:nvPr/>
         </p:nvPicPr>
         <p:blipFill>
-          <a:blip r:embed="rId7">
+          <a:blip r:embed="rId6">
             <a:extLst>
               <a:ext uri="{28A0092B-C50C-407E-A947-70E740481C1C}">
                 <a14:useLocalDpi xmlns:a14="http://schemas.microsoft.com/office/drawing/2010/main" val="0"/>
@@ -16218,7 +16183,7 @@
         <p:spPr>
           <a:xfrm>
             <a:off x="10299697" y="4776397"/>
-            <a:ext cx="7018534" cy="1699565"/>
+            <a:ext cx="7018534" cy="1418722"/>
           </a:xfrm>
           <a:prstGeom prst="rect">
             <a:avLst/>
@@ -16238,7 +16203,7 @@
               <a:buChar char="•"/>
             </a:pPr>
             <a:r>
-              <a:rPr lang="en-US" sz="1876">
+              <a:rPr lang="en-US" sz="1876" dirty="0">
                 <a:solidFill>
                   <a:srgbClr val="4C4C4D"/>
                 </a:solidFill>
@@ -16247,7 +16212,7 @@
                 <a:cs typeface="Heebo"/>
                 <a:sym typeface="Heebo"/>
               </a:rPr>
-              <a:t>Attrition by Department (bar chart)</a:t>
+              <a:t>Attrition by Department (pie chart)</a:t>
             </a:r>
           </a:p>
           <a:p>
@@ -16259,7 +16224,7 @@
               <a:buChar char="•"/>
             </a:pPr>
             <a:r>
-              <a:rPr lang="en-US" sz="1876">
+              <a:rPr lang="en-US" sz="1876" dirty="0">
                 <a:solidFill>
                   <a:srgbClr val="4C4C4D"/>
                 </a:solidFill>
@@ -16280,7 +16245,7 @@
               <a:buChar char="•"/>
             </a:pPr>
             <a:r>
-              <a:rPr lang="en-US" sz="1876">
+              <a:rPr lang="en-US" sz="1876" dirty="0">
                 <a:solidFill>
                   <a:srgbClr val="4C4C4D"/>
                 </a:solidFill>
@@ -16301,7 +16266,7 @@
               <a:buChar char="•"/>
             </a:pPr>
             <a:r>
-              <a:rPr lang="en-US" sz="1876">
+              <a:rPr lang="en-US" sz="1876" dirty="0">
                 <a:solidFill>
                   <a:srgbClr val="4C4C4D"/>
                 </a:solidFill>

--- a/HR-Employee-Analytics-Dashboard.pptx
+++ b/HR-Employee-Analytics-Dashboard.pptx
@@ -7125,7 +7125,7 @@
                 <a:cs typeface="Heebo"/>
                 <a:sym typeface="Heebo"/>
               </a:rPr>
-              <a:t>Job satisfaction levels correlated with sum of years at company, sum of monthly income, and sum of total working years – and visualizing of all tenure bands.</a:t>
+              <a:t>Job satisfaction levels correlated with sum of years at company, sum of monthly income, and sum of total working years – and visualizing of all employee and salary.</a:t>
             </a:r>
           </a:p>
         </p:txBody>
@@ -14605,7 +14605,7 @@
         </p:nvGrpSpPr>
         <p:grpSpPr>
           <a:xfrm>
-            <a:off x="992991" y="8255098"/>
+            <a:off x="9450669" y="6499322"/>
             <a:ext cx="8078105" cy="1151344"/>
             <a:chOff x="0" y="0"/>
             <a:chExt cx="10770806" cy="1535125"/>
@@ -14687,7 +14687,7 @@
         </p:nvSpPr>
         <p:spPr>
           <a:xfrm>
-            <a:off x="1205674" y="8448742"/>
+            <a:off x="9642281" y="6686148"/>
             <a:ext cx="7652728" cy="351492"/>
           </a:xfrm>
           <a:prstGeom prst="rect">
@@ -14706,7 +14706,7 @@
               </a:lnSpc>
             </a:pPr>
             <a:r>
-              <a:rPr lang="en-US" sz="2026">
+              <a:rPr lang="en-US" sz="2026" dirty="0">
                 <a:solidFill>
                   <a:srgbClr val="4C4C4D"/>
                 </a:solidFill>
@@ -14728,7 +14728,7 @@
         </p:nvSpPr>
         <p:spPr>
           <a:xfrm>
-            <a:off x="1205674" y="8857755"/>
+            <a:off x="9642281" y="7095161"/>
             <a:ext cx="7652728" cy="335994"/>
           </a:xfrm>
           <a:prstGeom prst="rect">
@@ -14747,7 +14747,7 @@
               </a:lnSpc>
             </a:pPr>
             <a:r>
-              <a:rPr lang="en-US" sz="1651">
+              <a:rPr lang="en-US" sz="1651" dirty="0">
                 <a:solidFill>
                   <a:srgbClr val="4C4C4D"/>
                 </a:solidFill>
@@ -14769,10 +14769,10 @@
         </p:nvGrpSpPr>
         <p:grpSpPr>
           <a:xfrm>
-            <a:off x="9230601" y="8255098"/>
-            <a:ext cx="8078248" cy="1151344"/>
-            <a:chOff x="0" y="0"/>
-            <a:chExt cx="10770997" cy="1535125"/>
+            <a:off x="9450669" y="7873098"/>
+            <a:ext cx="8078248" cy="1151287"/>
+            <a:chOff x="293424" y="-511935"/>
+            <a:chExt cx="10770997" cy="1535049"/>
           </a:xfrm>
         </p:grpSpPr>
         <p:sp>
@@ -14783,7 +14783,7 @@
           </p:nvSpPr>
           <p:spPr>
             <a:xfrm>
-              <a:off x="0" y="0"/>
+              <a:off x="293424" y="-511935"/>
               <a:ext cx="10770997" cy="1535049"/>
             </a:xfrm>
             <a:custGeom>
@@ -14838,7 +14838,7 @@
             <a:bodyPr/>
             <a:lstStyle/>
             <a:p>
-              <a:endParaRPr lang="en-IN"/>
+              <a:endParaRPr lang="en-IN" dirty="0"/>
             </a:p>
           </p:txBody>
         </p:sp>
@@ -14851,7 +14851,7 @@
         </p:nvSpPr>
         <p:spPr>
           <a:xfrm>
-            <a:off x="9443295" y="8448742"/>
+            <a:off x="9644529" y="8039100"/>
             <a:ext cx="7652871" cy="351492"/>
           </a:xfrm>
           <a:prstGeom prst="rect">
@@ -14870,7 +14870,7 @@
               </a:lnSpc>
             </a:pPr>
             <a:r>
-              <a:rPr lang="en-US" sz="2026">
+              <a:rPr lang="en-US" sz="2026" dirty="0">
                 <a:solidFill>
                   <a:srgbClr val="4C4C4D"/>
                 </a:solidFill>
@@ -14892,7 +14892,7 @@
         </p:nvSpPr>
         <p:spPr>
           <a:xfrm>
-            <a:off x="9443295" y="8857755"/>
+            <a:off x="9644529" y="8496300"/>
             <a:ext cx="7652871" cy="335994"/>
           </a:xfrm>
           <a:prstGeom prst="rect">
@@ -14911,7 +14911,7 @@
               </a:lnSpc>
             </a:pPr>
             <a:r>
-              <a:rPr lang="en-US" sz="1651">
+              <a:rPr lang="en-US" sz="1651" dirty="0">
                 <a:solidFill>
                   <a:srgbClr val="4C4C4D"/>
                 </a:solidFill>

--- a/HR-Employee-Analytics-Dashboard.pptx
+++ b/HR-Employee-Analytics-Dashboard.pptx
@@ -16254,7 +16254,7 @@
                 <a:cs typeface="Heebo"/>
                 <a:sym typeface="Heebo"/>
               </a:rPr>
-              <a:t>Salary Analysis by band</a:t>
+              <a:t>Salary Analysis by Departments</a:t>
             </a:r>
           </a:p>
           <a:p>

--- a/HR-Employee-Analytics-Dashboard.pptx
+++ b/HR-Employee-Analytics-Dashboard.pptx
@@ -7126,148 +7126,6 @@
                 <a:sym typeface="Heebo"/>
               </a:rPr>
               <a:t>Job satisfaction levels correlated with sum of years at company, sum of monthly income, and sum of total working years – and visualizing of all employee and salary.</a:t>
-            </a:r>
-          </a:p>
-        </p:txBody>
-      </p:sp>
-      <p:sp>
-        <p:nvSpPr>
-          <p:cNvPr id="18" name="TextBox 18">
-            <a:extLst>
-              <a:ext uri="{FF2B5EF4-FFF2-40B4-BE49-F238E27FC236}">
-                <a16:creationId xmlns:a16="http://schemas.microsoft.com/office/drawing/2014/main" id="{50D2B8E2-1FD8-EBB7-92AD-7043C96537EB}"/>
-              </a:ext>
-            </a:extLst>
-          </p:cNvPr>
-          <p:cNvSpPr txBox="1"/>
-          <p:nvPr/>
-        </p:nvSpPr>
-        <p:spPr>
-          <a:xfrm>
-            <a:off x="992991" y="6946879"/>
-            <a:ext cx="7037451" cy="383210"/>
-          </a:xfrm>
-          <a:prstGeom prst="rect">
-            <a:avLst/>
-          </a:prstGeom>
-        </p:spPr>
-        <p:txBody>
-          <a:bodyPr lIns="0" tIns="0" rIns="0" bIns="0" rtlCol="0" anchor="t">
-            <a:spAutoFit/>
-          </a:bodyPr>
-          <a:lstStyle/>
-          <a:p>
-            <a:pPr algn="l">
-              <a:lnSpc>
-                <a:spcPts val="2716"/>
-              </a:lnSpc>
-            </a:pPr>
-            <a:r>
-              <a:rPr lang="en-US" sz="2176" dirty="0">
-                <a:solidFill>
-                  <a:srgbClr val="152D47"/>
-                </a:solidFill>
-                <a:latin typeface="Crimson Pro"/>
-                <a:ea typeface="Crimson Pro"/>
-                <a:cs typeface="Crimson Pro"/>
-                <a:sym typeface="Crimson Pro"/>
-              </a:rPr>
-              <a:t>Drill-Through</a:t>
-            </a:r>
-          </a:p>
-        </p:txBody>
-      </p:sp>
-      <p:sp>
-        <p:nvSpPr>
-          <p:cNvPr id="19" name="TextBox 19">
-            <a:extLst>
-              <a:ext uri="{FF2B5EF4-FFF2-40B4-BE49-F238E27FC236}">
-                <a16:creationId xmlns:a16="http://schemas.microsoft.com/office/drawing/2014/main" id="{DED16B60-5900-683F-F443-F7D55E5B0816}"/>
-              </a:ext>
-            </a:extLst>
-          </p:cNvPr>
-          <p:cNvSpPr txBox="1"/>
-          <p:nvPr/>
-        </p:nvSpPr>
-        <p:spPr>
-          <a:xfrm>
-            <a:off x="992991" y="7483080"/>
-            <a:ext cx="7037451" cy="627479"/>
-          </a:xfrm>
-          <a:prstGeom prst="rect">
-            <a:avLst/>
-          </a:prstGeom>
-        </p:spPr>
-        <p:txBody>
-          <a:bodyPr lIns="0" tIns="0" rIns="0" bIns="0" rtlCol="0" anchor="t">
-            <a:spAutoFit/>
-          </a:bodyPr>
-          <a:lstStyle/>
-          <a:p>
-            <a:pPr algn="l">
-              <a:lnSpc>
-                <a:spcPts val="2485"/>
-              </a:lnSpc>
-            </a:pPr>
-            <a:r>
-              <a:rPr lang="en-US" sz="1726" dirty="0">
-                <a:solidFill>
-                  <a:srgbClr val="4C4C4D"/>
-                </a:solidFill>
-                <a:latin typeface="Heebo"/>
-                <a:ea typeface="Heebo"/>
-                <a:cs typeface="Heebo"/>
-                <a:sym typeface="Heebo"/>
-              </a:rPr>
-              <a:t>Click any department row to navigate to a </a:t>
-            </a:r>
-            <a:r>
-              <a:rPr lang="en-US" sz="1726" b="1" dirty="0">
-                <a:solidFill>
-                  <a:srgbClr val="4C4C4D"/>
-                </a:solidFill>
-                <a:latin typeface="Heebo Bold"/>
-                <a:ea typeface="Heebo Bold"/>
-                <a:cs typeface="Heebo Bold"/>
-                <a:sym typeface="Heebo Bold"/>
-              </a:rPr>
-              <a:t>detailed individual profile page</a:t>
-            </a:r>
-            <a:r>
-              <a:rPr lang="en-US" sz="1726" dirty="0">
-                <a:solidFill>
-                  <a:srgbClr val="4C4C4D"/>
-                </a:solidFill>
-                <a:latin typeface="Heebo"/>
-                <a:ea typeface="Heebo"/>
-                <a:cs typeface="Heebo"/>
-                <a:sym typeface="Heebo"/>
-              </a:rPr>
-              <a:t> with </a:t>
-            </a:r>
-            <a:r>
-              <a:rPr lang="en-US" sz="1726" dirty="0" err="1">
-                <a:solidFill>
-                  <a:srgbClr val="4C4C4D"/>
-                </a:solidFill>
-                <a:latin typeface="Heebo"/>
-                <a:ea typeface="Heebo"/>
-                <a:cs typeface="Heebo"/>
-                <a:sym typeface="Heebo"/>
-              </a:rPr>
-              <a:t>JobRole</a:t>
-            </a:r>
-            <a:r>
-              <a:rPr lang="en-US" sz="1726" dirty="0">
-                <a:solidFill>
-                  <a:srgbClr val="4C4C4D"/>
-                </a:solidFill>
-                <a:latin typeface="Heebo"/>
-                <a:ea typeface="Heebo"/>
-                <a:cs typeface="Heebo"/>
-                <a:sym typeface="Heebo"/>
-              </a:rPr>
-              <a:t>.</a:t>
             </a:r>
           </a:p>
         </p:txBody>
